--- a/docs/RAAHI-loom-deck.pptx
+++ b/docs/RAAHI-loom-deck.pptx
@@ -16,6 +16,7 @@
     <p:sldId id="264" r:id="rId16"/>
     <p:sldId id="265" r:id="rId17"/>
     <p:sldId id="266" r:id="rId18"/>
+    <p:sldId id="267" r:id="rId19"/>
   </p:sldIdLst>
   <p:sldSz cx="12191695" cy="6858000" type="screen4x3"/>
   <p:notesSz cx="6858000" cy="9144000"/>
@@ -512,7 +513,7 @@
           <a:lstStyle/>
           <a:p>
             <a:r>
-              <a:t>Hold 3 seconds. Don't read the slide. Go straight to the problem.</a:t>
+              <a:t>Hold 3 seconds on the artwork. Don't read the slide. Go straight to the problem.</a:t>
             </a:r>
           </a:p>
         </p:txBody>
@@ -608,6 +609,76 @@
 </file>
 
 <file path=ppt/notesSlides/notesSlide11.xml><?xml version="1.0" encoding="utf-8"?>
+<p:notes xmlns:a="http://schemas.openxmlformats.org/drawingml/2006/main" xmlns:p="http://schemas.openxmlformats.org/presentationml/2006/main" xmlns:r="http://schemas.openxmlformats.org/officeDocument/2006/relationships">
+  <p:cSld>
+    <p:spTree>
+      <p:nvGrpSpPr>
+        <p:cNvPr id="1" name=""/>
+        <p:cNvGrpSpPr/>
+        <p:nvPr/>
+      </p:nvGrpSpPr>
+      <p:grpSpPr>
+        <a:xfrm>
+          <a:off x="0" y="0"/>
+          <a:ext cx="0" cy="0"/>
+          <a:chOff x="0" y="0"/>
+          <a:chExt cx="0" cy="0"/>
+        </a:xfrm>
+      </p:grpSpPr>
+      <p:sp>
+        <p:nvSpPr>
+          <p:cNvPr id="2" name="Slide Image Placeholder 1"/>
+          <p:cNvSpPr>
+            <a:spLocks noGrp="1"/>
+          </p:cNvSpPr>
+          <p:nvPr>
+            <p:ph type="sldImg" idx="2"/>
+          </p:nvPr>
+        </p:nvSpPr>
+        <p:spPr/>
+      </p:sp>
+      <p:sp>
+        <p:nvSpPr>
+          <p:cNvPr id="3" name="Notes Placeholder 2"/>
+          <p:cNvSpPr>
+            <a:spLocks noGrp="1"/>
+          </p:cNvSpPr>
+          <p:nvPr>
+            <p:ph type="body" idx="3" sz="quarter"/>
+          </p:nvPr>
+        </p:nvSpPr>
+        <p:spPr/>
+        <p:txBody>
+          <a:bodyPr/>
+          <a:lstStyle/>
+          <a:p>
+            <a:r>
+              <a:t>Use as the emotional beat before the call to action, or as the closing hold.</a:t>
+            </a:r>
+          </a:p>
+        </p:txBody>
+      </p:sp>
+      <p:sp>
+        <p:nvSpPr>
+          <p:cNvPr id="4" name="Slide Number Placeholder 3"/>
+          <p:cNvSpPr>
+            <a:spLocks noGrp="1"/>
+          </p:cNvSpPr>
+          <p:nvPr>
+            <p:ph type="sldNum" idx="5" sz="quarter"/>
+          </p:nvPr>
+        </p:nvSpPr>
+        <p:spPr/>
+      </p:sp>
+    </p:spTree>
+  </p:cSld>
+  <p:clrMapOvr>
+    <a:masterClrMapping/>
+  </p:clrMapOvr>
+</p:notes>
+</file>
+
+<file path=ppt/notesSlides/notesSlide12.xml><?xml version="1.0" encoding="utf-8"?>
 <p:notes xmlns:a="http://schemas.openxmlformats.org/drawingml/2006/main" xmlns:p="http://schemas.openxmlformats.org/presentationml/2006/main" xmlns:r="http://schemas.openxmlformats.org/officeDocument/2006/relationships">
   <p:cSld>
     <p:spTree>
@@ -4262,16 +4333,335 @@
           </a:p>
         </p:txBody>
       </p:sp>
-      <p:sp>
-        <p:nvSpPr>
-          <p:cNvPr id="3" name="Rectangle 2"/>
+      <p:pic>
+        <p:nvPicPr>
+          <p:cNvPr id="3" name="Picture 2" descr="raahi-hero.jpg"/>
+          <p:cNvPicPr>
+            <a:picLocks noChangeAspect="1"/>
+          </p:cNvPicPr>
+          <p:nvPr/>
+        </p:nvPicPr>
+        <p:blipFill>
+          <a:blip r:embed="rId2"/>
+          <a:stretch>
+            <a:fillRect/>
+          </a:stretch>
+        </p:blipFill>
+        <p:spPr>
+          <a:xfrm>
+            <a:off x="0" y="0"/>
+            <a:ext cx="12191695" cy="6858000"/>
+          </a:xfrm>
+          <a:prstGeom prst="rect">
+            <a:avLst/>
+          </a:prstGeom>
+        </p:spPr>
+      </p:pic>
+      <p:sp>
+        <p:nvSpPr>
+          <p:cNvPr id="4" name="Rectangle 3"/>
           <p:cNvSpPr/>
           <p:nvPr/>
         </p:nvSpPr>
         <p:spPr>
           <a:xfrm>
             <a:off x="0" y="0"/>
-            <a:ext cx="12191695" cy="128016"/>
+            <a:ext cx="6309360" cy="6858000"/>
+          </a:xfrm>
+          <a:prstGeom prst="rect">
+            <a:avLst/>
+          </a:prstGeom>
+          <a:solidFill>
+            <a:srgbClr val="101012">
+              <a:alpha val="72000"/>
+            </a:srgbClr>
+          </a:solidFill>
+          <a:ln>
+            <a:noFill/>
+          </a:ln>
+          <a:effectLst/>
+        </p:spPr>
+        <p:style>
+          <a:lnRef idx="1">
+            <a:schemeClr val="accent1"/>
+          </a:lnRef>
+          <a:fillRef idx="3">
+            <a:schemeClr val="accent1"/>
+          </a:fillRef>
+          <a:effectRef idx="2">
+            <a:schemeClr val="accent1"/>
+          </a:effectRef>
+          <a:fontRef idx="minor">
+            <a:schemeClr val="lt1"/>
+          </a:fontRef>
+        </p:style>
+        <p:txBody>
+          <a:bodyPr rtlCol="0" anchor="ctr"/>
+          <a:lstStyle/>
+          <a:p>
+            <a:pPr algn="ctr"/>
+          </a:p>
+        </p:txBody>
+      </p:sp>
+      <p:pic>
+        <p:nvPicPr>
+          <p:cNvPr id="5" name="Picture 4" descr="raahi-symbol.png"/>
+          <p:cNvPicPr>
+            <a:picLocks noChangeAspect="1"/>
+          </p:cNvPicPr>
+          <p:nvPr/>
+        </p:nvPicPr>
+        <p:blipFill>
+          <a:blip r:embed="rId3"/>
+          <a:stretch>
+            <a:fillRect/>
+          </a:stretch>
+        </p:blipFill>
+        <p:spPr>
+          <a:xfrm>
+            <a:off x="777240" y="1325880"/>
+            <a:ext cx="1112996" cy="868680"/>
+          </a:xfrm>
+          <a:prstGeom prst="rect">
+            <a:avLst/>
+          </a:prstGeom>
+        </p:spPr>
+      </p:pic>
+      <p:sp>
+        <p:nvSpPr>
+          <p:cNvPr id="6" name="TextBox 5"/>
+          <p:cNvSpPr txBox="1"/>
+          <p:nvPr/>
+        </p:nvSpPr>
+        <p:spPr>
+          <a:xfrm>
+            <a:off x="777240" y="2377440"/>
+            <a:ext cx="5486400" cy="1005840"/>
+          </a:xfrm>
+          <a:prstGeom prst="rect">
+            <a:avLst/>
+          </a:prstGeom>
+          <a:noFill/>
+        </p:spPr>
+        <p:txBody>
+          <a:bodyPr wrap="square">
+            <a:spAutoFit/>
+          </a:bodyPr>
+          <a:lstStyle/>
+          <a:p>
+            <a:pPr algn="l">
+              <a:lnSpc>
+                <a:spcPct val="125000"/>
+              </a:lnSpc>
+              <a:spcAft>
+                <a:spcPts val="600"/>
+              </a:spcAft>
+            </a:pPr>
+            <a:r>
+              <a:rPr sz="6400" b="1">
+                <a:solidFill>
+                  <a:srgbClr val="FFFFFF"/>
+                </a:solidFill>
+                <a:latin typeface="Helvetica Neue"/>
+              </a:rPr>
+              <a:t>RAAHI</a:t>
+            </a:r>
+          </a:p>
+        </p:txBody>
+      </p:sp>
+      <p:sp>
+        <p:nvSpPr>
+          <p:cNvPr id="7" name="TextBox 6"/>
+          <p:cNvSpPr txBox="1"/>
+          <p:nvPr/>
+        </p:nvSpPr>
+        <p:spPr>
+          <a:xfrm>
+            <a:off x="822960" y="3401568"/>
+            <a:ext cx="5486400" cy="365760"/>
+          </a:xfrm>
+          <a:prstGeom prst="rect">
+            <a:avLst/>
+          </a:prstGeom>
+          <a:noFill/>
+        </p:spPr>
+        <p:txBody>
+          <a:bodyPr wrap="square">
+            <a:spAutoFit/>
+          </a:bodyPr>
+          <a:lstStyle/>
+          <a:p>
+            <a:pPr algn="l">
+              <a:lnSpc>
+                <a:spcPct val="125000"/>
+              </a:lnSpc>
+              <a:spcAft>
+                <a:spcPts val="600"/>
+              </a:spcAft>
+            </a:pPr>
+            <a:r>
+              <a:rPr sz="1300" b="0">
+                <a:solidFill>
+                  <a:srgbClr val="C39C57"/>
+                </a:solidFill>
+                <a:latin typeface="Helvetica Neue"/>
+              </a:rPr>
+              <a:t>Y O U R   W A Y   F O R W A R D</a:t>
+            </a:r>
+          </a:p>
+        </p:txBody>
+      </p:sp>
+      <p:sp>
+        <p:nvSpPr>
+          <p:cNvPr id="8" name="TextBox 7"/>
+          <p:cNvSpPr txBox="1"/>
+          <p:nvPr/>
+        </p:nvSpPr>
+        <p:spPr>
+          <a:xfrm>
+            <a:off x="777240" y="3931920"/>
+            <a:ext cx="5394960" cy="1280160"/>
+          </a:xfrm>
+          <a:prstGeom prst="rect">
+            <a:avLst/>
+          </a:prstGeom>
+          <a:noFill/>
+        </p:spPr>
+        <p:txBody>
+          <a:bodyPr wrap="square">
+            <a:spAutoFit/>
+          </a:bodyPr>
+          <a:lstStyle/>
+          <a:p>
+            <a:pPr algn="l">
+              <a:lnSpc>
+                <a:spcPct val="140000"/>
+              </a:lnSpc>
+              <a:spcAft>
+                <a:spcPts val="600"/>
+              </a:spcAft>
+            </a:pPr>
+            <a:r>
+              <a:rPr sz="1900" b="0">
+                <a:solidFill>
+                  <a:srgbClr val="FFFFFF"/>
+                </a:solidFill>
+                <a:latin typeface="Helvetica Neue"/>
+              </a:rPr>
+              <a:t>A voice copilot that reads the page airlines</a:t>
+            </a:r>
+          </a:p>
+          <a:p>
+            <a:pPr algn="l">
+              <a:lnSpc>
+                <a:spcPct val="140000"/>
+              </a:lnSpc>
+              <a:spcAft>
+                <a:spcPts val="600"/>
+              </a:spcAft>
+            </a:pPr>
+            <a:r>
+              <a:rPr sz="1900" b="0">
+                <a:solidFill>
+                  <a:srgbClr val="FFFFFF"/>
+                </a:solidFill>
+                <a:latin typeface="Helvetica Neue"/>
+              </a:rPr>
+              <a:t>actually publish — and tells a stranded</a:t>
+            </a:r>
+          </a:p>
+          <a:p>
+            <a:pPr algn="l">
+              <a:lnSpc>
+                <a:spcPct val="140000"/>
+              </a:lnSpc>
+              <a:spcAft>
+                <a:spcPts val="600"/>
+              </a:spcAft>
+            </a:pPr>
+            <a:r>
+              <a:rPr sz="1900" b="0">
+                <a:solidFill>
+                  <a:srgbClr val="FFFFFF"/>
+                </a:solidFill>
+                <a:latin typeface="Helvetica Neue"/>
+              </a:rPr>
+              <a:t>passenger what to do next.</a:t>
+            </a:r>
+          </a:p>
+        </p:txBody>
+      </p:sp>
+      <p:sp>
+        <p:nvSpPr>
+          <p:cNvPr id="9" name="TextBox 8"/>
+          <p:cNvSpPr txBox="1"/>
+          <p:nvPr/>
+        </p:nvSpPr>
+        <p:spPr>
+          <a:xfrm>
+            <a:off x="777240" y="5532120"/>
+            <a:ext cx="5486400" cy="731520"/>
+          </a:xfrm>
+          <a:prstGeom prst="rect">
+            <a:avLst/>
+          </a:prstGeom>
+          <a:noFill/>
+        </p:spPr>
+        <p:txBody>
+          <a:bodyPr wrap="square">
+            <a:spAutoFit/>
+          </a:bodyPr>
+          <a:lstStyle/>
+          <a:p>
+            <a:pPr algn="l">
+              <a:lnSpc>
+                <a:spcPct val="135000"/>
+              </a:lnSpc>
+              <a:spcAft>
+                <a:spcPts val="600"/>
+              </a:spcAft>
+            </a:pPr>
+            <a:r>
+              <a:rPr sz="1200" b="0">
+                <a:solidFill>
+                  <a:srgbClr val="C9CCD2"/>
+                </a:solidFill>
+                <a:latin typeface="Helvetica Neue"/>
+              </a:rPr>
+              <a:t>Siraj  ·  Astha  ·  Farman</a:t>
+            </a:r>
+          </a:p>
+          <a:p>
+            <a:pPr algn="l">
+              <a:lnSpc>
+                <a:spcPct val="135000"/>
+              </a:lnSpc>
+              <a:spcAft>
+                <a:spcPts val="600"/>
+              </a:spcAft>
+            </a:pPr>
+            <a:r>
+              <a:rPr sz="1200" b="0">
+                <a:solidFill>
+                  <a:srgbClr val="C9CCD2"/>
+                </a:solidFill>
+                <a:latin typeface="Helvetica Neue"/>
+              </a:rPr>
+              <a:t>BUiD Voice Agents Hackathon, Dubai  ·  8 August 2026</a:t>
+            </a:r>
+          </a:p>
+        </p:txBody>
+      </p:sp>
+      <p:sp>
+        <p:nvSpPr>
+          <p:cNvPr id="10" name="Rectangle 9"/>
+          <p:cNvSpPr/>
+          <p:nvPr/>
+        </p:nvSpPr>
+        <p:spPr>
+          <a:xfrm>
+            <a:off x="0" y="6775704"/>
+            <a:ext cx="12191695" cy="82296"/>
           </a:xfrm>
           <a:prstGeom prst="rect">
             <a:avLst/>
@@ -4303,261 +4693,6 @@
           <a:lstStyle/>
           <a:p>
             <a:pPr algn="ctr"/>
-          </a:p>
-        </p:txBody>
-      </p:sp>
-      <p:sp>
-        <p:nvSpPr>
-          <p:cNvPr id="4" name="Rectangle 3"/>
-          <p:cNvSpPr/>
-          <p:nvPr/>
-        </p:nvSpPr>
-        <p:spPr>
-          <a:xfrm>
-            <a:off x="0" y="128016"/>
-            <a:ext cx="12191695" cy="38100"/>
-          </a:xfrm>
-          <a:prstGeom prst="rect">
-            <a:avLst/>
-          </a:prstGeom>
-          <a:solidFill>
-            <a:srgbClr val="C39C57"/>
-          </a:solidFill>
-          <a:ln>
-            <a:noFill/>
-          </a:ln>
-          <a:effectLst/>
-        </p:spPr>
-        <p:style>
-          <a:lnRef idx="1">
-            <a:schemeClr val="accent1"/>
-          </a:lnRef>
-          <a:fillRef idx="3">
-            <a:schemeClr val="accent1"/>
-          </a:fillRef>
-          <a:effectRef idx="2">
-            <a:schemeClr val="accent1"/>
-          </a:effectRef>
-          <a:fontRef idx="minor">
-            <a:schemeClr val="lt1"/>
-          </a:fontRef>
-        </p:style>
-        <p:txBody>
-          <a:bodyPr rtlCol="0" anchor="ctr"/>
-          <a:lstStyle/>
-          <a:p>
-            <a:pPr algn="ctr"/>
-          </a:p>
-        </p:txBody>
-      </p:sp>
-      <p:pic>
-        <p:nvPicPr>
-          <p:cNvPr id="5" name="Picture 4" descr="raahi-symbol.png"/>
-          <p:cNvPicPr>
-            <a:picLocks noChangeAspect="1"/>
-          </p:cNvPicPr>
-          <p:nvPr/>
-        </p:nvPicPr>
-        <p:blipFill>
-          <a:blip r:embed="rId2"/>
-          <a:stretch>
-            <a:fillRect/>
-          </a:stretch>
-        </p:blipFill>
-        <p:spPr>
-          <a:xfrm>
-            <a:off x="5230368" y="1417320"/>
-            <a:ext cx="1581626" cy="1234440"/>
-          </a:xfrm>
-          <a:prstGeom prst="rect">
-            <a:avLst/>
-          </a:prstGeom>
-        </p:spPr>
-      </p:pic>
-      <p:sp>
-        <p:nvSpPr>
-          <p:cNvPr id="6" name="TextBox 5"/>
-          <p:cNvSpPr txBox="1"/>
-          <p:nvPr/>
-        </p:nvSpPr>
-        <p:spPr>
-          <a:xfrm>
-            <a:off x="731520" y="2788920"/>
-            <a:ext cx="10698480" cy="914400"/>
-          </a:xfrm>
-          <a:prstGeom prst="rect">
-            <a:avLst/>
-          </a:prstGeom>
-          <a:noFill/>
-        </p:spPr>
-        <p:txBody>
-          <a:bodyPr wrap="square">
-            <a:spAutoFit/>
-          </a:bodyPr>
-          <a:lstStyle/>
-          <a:p>
-            <a:pPr algn="ctr">
-              <a:lnSpc>
-                <a:spcPct val="125000"/>
-              </a:lnSpc>
-              <a:spcAft>
-                <a:spcPts val="600"/>
-              </a:spcAft>
-            </a:pPr>
-            <a:r>
-              <a:rPr sz="6200" b="1">
-                <a:solidFill>
-                  <a:srgbClr val="D71921"/>
-                </a:solidFill>
-                <a:latin typeface="Helvetica Neue"/>
-              </a:rPr>
-              <a:t>RAAHI</a:t>
-            </a:r>
-          </a:p>
-        </p:txBody>
-      </p:sp>
-      <p:sp>
-        <p:nvSpPr>
-          <p:cNvPr id="7" name="TextBox 6"/>
-          <p:cNvSpPr txBox="1"/>
-          <p:nvPr/>
-        </p:nvSpPr>
-        <p:spPr>
-          <a:xfrm>
-            <a:off x="731520" y="3703320"/>
-            <a:ext cx="10698480" cy="365760"/>
-          </a:xfrm>
-          <a:prstGeom prst="rect">
-            <a:avLst/>
-          </a:prstGeom>
-          <a:noFill/>
-        </p:spPr>
-        <p:txBody>
-          <a:bodyPr wrap="square">
-            <a:spAutoFit/>
-          </a:bodyPr>
-          <a:lstStyle/>
-          <a:p>
-            <a:pPr algn="ctr">
-              <a:lnSpc>
-                <a:spcPct val="125000"/>
-              </a:lnSpc>
-              <a:spcAft>
-                <a:spcPts val="600"/>
-              </a:spcAft>
-            </a:pPr>
-            <a:r>
-              <a:rPr sz="1300" b="0">
-                <a:solidFill>
-                  <a:srgbClr val="5C6069"/>
-                </a:solidFill>
-                <a:latin typeface="Helvetica Neue"/>
-              </a:rPr>
-              <a:t>Y O U R   W A Y   F O R W A R D</a:t>
-            </a:r>
-          </a:p>
-        </p:txBody>
-      </p:sp>
-      <p:sp>
-        <p:nvSpPr>
-          <p:cNvPr id="8" name="TextBox 7"/>
-          <p:cNvSpPr txBox="1"/>
-          <p:nvPr/>
-        </p:nvSpPr>
-        <p:spPr>
-          <a:xfrm>
-            <a:off x="1463040" y="4343400"/>
-            <a:ext cx="9235440" cy="914400"/>
-          </a:xfrm>
-          <a:prstGeom prst="rect">
-            <a:avLst/>
-          </a:prstGeom>
-          <a:noFill/>
-        </p:spPr>
-        <p:txBody>
-          <a:bodyPr wrap="square">
-            <a:spAutoFit/>
-          </a:bodyPr>
-          <a:lstStyle/>
-          <a:p>
-            <a:pPr algn="ctr">
-              <a:lnSpc>
-                <a:spcPct val="135000"/>
-              </a:lnSpc>
-              <a:spcAft>
-                <a:spcPts val="600"/>
-              </a:spcAft>
-            </a:pPr>
-            <a:r>
-              <a:rPr sz="1900" b="0">
-                <a:solidFill>
-                  <a:srgbClr val="1C1C1C"/>
-                </a:solidFill>
-                <a:latin typeface="Helvetica Neue"/>
-              </a:rPr>
-              <a:t>A voice copilot that reads the page airlines actually publish —</a:t>
-            </a:r>
-          </a:p>
-          <a:p>
-            <a:pPr algn="ctr">
-              <a:lnSpc>
-                <a:spcPct val="135000"/>
-              </a:lnSpc>
-              <a:spcAft>
-                <a:spcPts val="600"/>
-              </a:spcAft>
-            </a:pPr>
-            <a:r>
-              <a:rPr sz="1900" b="0">
-                <a:solidFill>
-                  <a:srgbClr val="1C1C1C"/>
-                </a:solidFill>
-                <a:latin typeface="Helvetica Neue"/>
-              </a:rPr>
-              <a:t>and tells a stranded passenger what to do next.</a:t>
-            </a:r>
-          </a:p>
-        </p:txBody>
-      </p:sp>
-      <p:sp>
-        <p:nvSpPr>
-          <p:cNvPr id="9" name="TextBox 8"/>
-          <p:cNvSpPr txBox="1"/>
-          <p:nvPr/>
-        </p:nvSpPr>
-        <p:spPr>
-          <a:xfrm>
-            <a:off x="731520" y="5943600"/>
-            <a:ext cx="10698480" cy="365760"/>
-          </a:xfrm>
-          <a:prstGeom prst="rect">
-            <a:avLst/>
-          </a:prstGeom>
-          <a:noFill/>
-        </p:spPr>
-        <p:txBody>
-          <a:bodyPr wrap="square">
-            <a:spAutoFit/>
-          </a:bodyPr>
-          <a:lstStyle/>
-          <a:p>
-            <a:pPr algn="ctr">
-              <a:lnSpc>
-                <a:spcPct val="125000"/>
-              </a:lnSpc>
-              <a:spcAft>
-                <a:spcPts val="600"/>
-              </a:spcAft>
-            </a:pPr>
-            <a:r>
-              <a:rPr sz="1200" b="0">
-                <a:solidFill>
-                  <a:srgbClr val="5C6069"/>
-                </a:solidFill>
-                <a:latin typeface="Helvetica Neue"/>
-              </a:rPr>
-              <a:t>Siraj  ·  Astha  ·  Farman        BUiD Voice Agents Hackathon, Dubai  ·  8 August 2026</a:t>
-            </a:r>
           </a:p>
         </p:txBody>
       </p:sp>
@@ -5012,6 +5147,285 @@
 </file>
 
 <file path=ppt/slides/slide11.xml><?xml version="1.0" encoding="utf-8"?>
+<p:sld xmlns:a="http://schemas.openxmlformats.org/drawingml/2006/main" xmlns:p="http://schemas.openxmlformats.org/presentationml/2006/main" xmlns:r="http://schemas.openxmlformats.org/officeDocument/2006/relationships">
+  <p:cSld>
+    <p:spTree>
+      <p:nvGrpSpPr>
+        <p:cNvPr id="1" name=""/>
+        <p:cNvGrpSpPr/>
+        <p:nvPr/>
+      </p:nvGrpSpPr>
+      <p:grpSpPr/>
+      <p:sp>
+        <p:nvSpPr>
+          <p:cNvPr id="2" name="Rectangle 1"/>
+          <p:cNvSpPr/>
+          <p:nvPr/>
+        </p:nvSpPr>
+        <p:spPr>
+          <a:xfrm>
+            <a:off x="0" y="0"/>
+            <a:ext cx="12191695" cy="6858000"/>
+          </a:xfrm>
+          <a:prstGeom prst="rect">
+            <a:avLst/>
+          </a:prstGeom>
+          <a:solidFill>
+            <a:srgbClr val="FFFFFF"/>
+          </a:solidFill>
+          <a:ln>
+            <a:noFill/>
+          </a:ln>
+          <a:effectLst/>
+        </p:spPr>
+        <p:style>
+          <a:lnRef idx="1">
+            <a:schemeClr val="accent1"/>
+          </a:lnRef>
+          <a:fillRef idx="3">
+            <a:schemeClr val="accent1"/>
+          </a:fillRef>
+          <a:effectRef idx="2">
+            <a:schemeClr val="accent1"/>
+          </a:effectRef>
+          <a:fontRef idx="minor">
+            <a:schemeClr val="lt1"/>
+          </a:fontRef>
+        </p:style>
+        <p:txBody>
+          <a:bodyPr rtlCol="0" anchor="ctr"/>
+          <a:lstStyle/>
+          <a:p>
+            <a:pPr algn="ctr"/>
+          </a:p>
+        </p:txBody>
+      </p:sp>
+      <p:pic>
+        <p:nvPicPr>
+          <p:cNvPr id="3" name="Picture 2" descr="raahi-hero.jpg"/>
+          <p:cNvPicPr>
+            <a:picLocks noChangeAspect="1"/>
+          </p:cNvPicPr>
+          <p:nvPr/>
+        </p:nvPicPr>
+        <p:blipFill>
+          <a:blip r:embed="rId2"/>
+          <a:stretch>
+            <a:fillRect/>
+          </a:stretch>
+        </p:blipFill>
+        <p:spPr>
+          <a:xfrm>
+            <a:off x="0" y="0"/>
+            <a:ext cx="12191695" cy="6858000"/>
+          </a:xfrm>
+          <a:prstGeom prst="rect">
+            <a:avLst/>
+          </a:prstGeom>
+        </p:spPr>
+      </p:pic>
+      <p:sp>
+        <p:nvSpPr>
+          <p:cNvPr id="4" name="Rectangle 3"/>
+          <p:cNvSpPr/>
+          <p:nvPr/>
+        </p:nvSpPr>
+        <p:spPr>
+          <a:xfrm>
+            <a:off x="0" y="4041648"/>
+            <a:ext cx="12191695" cy="2816352"/>
+          </a:xfrm>
+          <a:prstGeom prst="rect">
+            <a:avLst/>
+          </a:prstGeom>
+          <a:solidFill>
+            <a:srgbClr val="101012">
+              <a:alpha val="78000"/>
+            </a:srgbClr>
+          </a:solidFill>
+          <a:ln>
+            <a:noFill/>
+          </a:ln>
+          <a:effectLst/>
+        </p:spPr>
+        <p:style>
+          <a:lnRef idx="1">
+            <a:schemeClr val="accent1"/>
+          </a:lnRef>
+          <a:fillRef idx="3">
+            <a:schemeClr val="accent1"/>
+          </a:fillRef>
+          <a:effectRef idx="2">
+            <a:schemeClr val="accent1"/>
+          </a:effectRef>
+          <a:fontRef idx="minor">
+            <a:schemeClr val="lt1"/>
+          </a:fontRef>
+        </p:style>
+        <p:txBody>
+          <a:bodyPr rtlCol="0" anchor="ctr"/>
+          <a:lstStyle/>
+          <a:p>
+            <a:pPr algn="ctr"/>
+          </a:p>
+        </p:txBody>
+      </p:sp>
+      <p:sp>
+        <p:nvSpPr>
+          <p:cNvPr id="5" name="TextBox 4"/>
+          <p:cNvSpPr txBox="1"/>
+          <p:nvPr/>
+        </p:nvSpPr>
+        <p:spPr>
+          <a:xfrm>
+            <a:off x="777240" y="4315968"/>
+            <a:ext cx="10607040" cy="640080"/>
+          </a:xfrm>
+          <a:prstGeom prst="rect">
+            <a:avLst/>
+          </a:prstGeom>
+          <a:noFill/>
+        </p:spPr>
+        <p:txBody>
+          <a:bodyPr wrap="square">
+            <a:spAutoFit/>
+          </a:bodyPr>
+          <a:lstStyle/>
+          <a:p>
+            <a:pPr algn="l">
+              <a:lnSpc>
+                <a:spcPct val="125000"/>
+              </a:lnSpc>
+              <a:spcAft>
+                <a:spcPts val="600"/>
+              </a:spcAft>
+            </a:pPr>
+            <a:r>
+              <a:rPr sz="3400" b="1">
+                <a:solidFill>
+                  <a:srgbClr val="FFFFFF"/>
+                </a:solidFill>
+                <a:latin typeface="Helvetica Neue"/>
+              </a:rPr>
+              <a:t>One question. Every layer. Two seconds.</a:t>
+            </a:r>
+          </a:p>
+        </p:txBody>
+      </p:sp>
+      <p:sp>
+        <p:nvSpPr>
+          <p:cNvPr id="6" name="TextBox 5"/>
+          <p:cNvSpPr txBox="1"/>
+          <p:nvPr/>
+        </p:nvSpPr>
+        <p:spPr>
+          <a:xfrm>
+            <a:off x="777240" y="5029200"/>
+            <a:ext cx="10607040" cy="1005840"/>
+          </a:xfrm>
+          <a:prstGeom prst="rect">
+            <a:avLst/>
+          </a:prstGeom>
+          <a:noFill/>
+        </p:spPr>
+        <p:txBody>
+          <a:bodyPr wrap="square">
+            <a:spAutoFit/>
+          </a:bodyPr>
+          <a:lstStyle/>
+          <a:p>
+            <a:pPr algn="l">
+              <a:lnSpc>
+                <a:spcPct val="140000"/>
+              </a:lnSpc>
+              <a:spcAft>
+                <a:spcPts val="600"/>
+              </a:spcAft>
+            </a:pPr>
+            <a:r>
+              <a:rPr sz="1700" b="0">
+                <a:solidFill>
+                  <a:srgbClr val="DCDFE4"/>
+                </a:solidFill>
+                <a:latin typeface="Helvetica Neue"/>
+              </a:rPr>
+              <a:t>Voice · live advisory prose · entry rules · real aircraft · change detection — resolved into one</a:t>
+            </a:r>
+          </a:p>
+          <a:p>
+            <a:pPr algn="l">
+              <a:lnSpc>
+                <a:spcPct val="140000"/>
+              </a:lnSpc>
+              <a:spcAft>
+                <a:spcPts val="600"/>
+              </a:spcAft>
+            </a:pPr>
+            <a:r>
+              <a:rPr sz="1700" b="0">
+                <a:solidFill>
+                  <a:srgbClr val="DCDFE4"/>
+                </a:solidFill>
+                <a:latin typeface="Helvetica Neue"/>
+              </a:rPr>
+              <a:t>sentence a passenger can act on, in the language they are frightened in.</a:t>
+            </a:r>
+          </a:p>
+        </p:txBody>
+      </p:sp>
+      <p:sp>
+        <p:nvSpPr>
+          <p:cNvPr id="7" name="Rectangle 6"/>
+          <p:cNvSpPr/>
+          <p:nvPr/>
+        </p:nvSpPr>
+        <p:spPr>
+          <a:xfrm>
+            <a:off x="0" y="6775704"/>
+            <a:ext cx="12191695" cy="82296"/>
+          </a:xfrm>
+          <a:prstGeom prst="rect">
+            <a:avLst/>
+          </a:prstGeom>
+          <a:solidFill>
+            <a:srgbClr val="D71921"/>
+          </a:solidFill>
+          <a:ln>
+            <a:noFill/>
+          </a:ln>
+          <a:effectLst/>
+        </p:spPr>
+        <p:style>
+          <a:lnRef idx="1">
+            <a:schemeClr val="accent1"/>
+          </a:lnRef>
+          <a:fillRef idx="3">
+            <a:schemeClr val="accent1"/>
+          </a:fillRef>
+          <a:effectRef idx="2">
+            <a:schemeClr val="accent1"/>
+          </a:effectRef>
+          <a:fontRef idx="minor">
+            <a:schemeClr val="lt1"/>
+          </a:fontRef>
+        </p:style>
+        <p:txBody>
+          <a:bodyPr rtlCol="0" anchor="ctr"/>
+          <a:lstStyle/>
+          <a:p>
+            <a:pPr algn="ctr"/>
+          </a:p>
+        </p:txBody>
+      </p:sp>
+    </p:spTree>
+  </p:cSld>
+  <p:clrMapOvr>
+    <a:masterClrMapping/>
+  </p:clrMapOvr>
+</p:sld>
+</file>
+
+<file path=ppt/slides/slide12.xml><?xml version="1.0" encoding="utf-8"?>
 <p:sld xmlns:a="http://schemas.openxmlformats.org/drawingml/2006/main" xmlns:p="http://schemas.openxmlformats.org/presentationml/2006/main" xmlns:r="http://schemas.openxmlformats.org/officeDocument/2006/relationships">
   <p:cSld>
     <p:spTree>

--- a/docs/RAAHI-loom-deck.pptx
+++ b/docs/RAAHI-loom-deck.pptx
@@ -6,17 +6,17 @@
   </p:sldMasterIdLst>
   <p:sldIdLst>
     <p:sldId id="256" r:id="rId7"/>
-    <p:sldId id="257" r:id="rId9"/>
-    <p:sldId id="258" r:id="rId10"/>
-    <p:sldId id="259" r:id="rId11"/>
-    <p:sldId id="260" r:id="rId12"/>
-    <p:sldId id="261" r:id="rId13"/>
-    <p:sldId id="262" r:id="rId14"/>
-    <p:sldId id="263" r:id="rId15"/>
-    <p:sldId id="264" r:id="rId16"/>
-    <p:sldId id="265" r:id="rId17"/>
-    <p:sldId id="266" r:id="rId18"/>
-    <p:sldId id="267" r:id="rId19"/>
+    <p:sldId id="257" r:id="rId8"/>
+    <p:sldId id="258" r:id="rId9"/>
+    <p:sldId id="259" r:id="rId10"/>
+    <p:sldId id="260" r:id="rId11"/>
+    <p:sldId id="261" r:id="rId12"/>
+    <p:sldId id="262" r:id="rId13"/>
+    <p:sldId id="263" r:id="rId14"/>
+    <p:sldId id="264" r:id="rId15"/>
+    <p:sldId id="265" r:id="rId16"/>
+    <p:sldId id="266" r:id="rId17"/>
+    <p:sldId id="267" r:id="rId18"/>
   </p:sldIdLst>
   <p:sldSz cx="12191695" cy="6858000" type="screen4x3"/>
   <p:notesSz cx="6858000" cy="9144000"/>
@@ -116,1196 +116,6 @@
     </a:lvl9pPr>
   </p:defaultTextStyle>
 </p:presentation>
-</file>
-
-<file path=ppt/notesMasters/notesMaster1.xml><?xml version="1.0" encoding="utf-8"?>
-<p:notesMaster xmlns:a="http://schemas.openxmlformats.org/drawingml/2006/main" xmlns:p="http://schemas.openxmlformats.org/presentationml/2006/main" xmlns:r="http://schemas.openxmlformats.org/officeDocument/2006/relationships">
-  <p:cSld>
-    <p:bg>
-      <p:bgRef idx="1001">
-        <a:schemeClr val="bg1"/>
-      </p:bgRef>
-    </p:bg>
-    <p:spTree>
-      <p:nvGrpSpPr>
-        <p:cNvPr id="1" name=""/>
-        <p:cNvGrpSpPr/>
-        <p:nvPr/>
-      </p:nvGrpSpPr>
-      <p:grpSpPr>
-        <a:xfrm>
-          <a:off x="0" y="0"/>
-          <a:ext cx="0" cy="0"/>
-          <a:chOff x="0" y="0"/>
-          <a:chExt cx="0" cy="0"/>
-        </a:xfrm>
-      </p:grpSpPr>
-      <p:sp>
-        <p:nvSpPr>
-          <p:cNvPr id="2" name="Header Placeholder 1"/>
-          <p:cNvSpPr>
-            <a:spLocks noGrp="1"/>
-          </p:cNvSpPr>
-          <p:nvPr>
-            <p:ph type="hdr" sz="quarter"/>
-          </p:nvPr>
-        </p:nvSpPr>
-        <p:spPr>
-          <a:xfrm>
-            <a:off x="0" y="0"/>
-            <a:ext cx="2971800" cy="457200"/>
-          </a:xfrm>
-          <a:prstGeom prst="rect">
-            <a:avLst/>
-          </a:prstGeom>
-        </p:spPr>
-        <p:txBody>
-          <a:bodyPr vert="horz" lIns="91440" tIns="45720" rIns="91440" bIns="45720" rtlCol="0"/>
-          <a:lstStyle>
-            <a:lvl1pPr algn="l">
-              <a:defRPr sz="1200"/>
-            </a:lvl1pPr>
-          </a:lstStyle>
-          <a:p>
-            <a:endParaRPr lang="en-US"/>
-          </a:p>
-        </p:txBody>
-      </p:sp>
-      <p:sp>
-        <p:nvSpPr>
-          <p:cNvPr id="3" name="Date Placeholder 2"/>
-          <p:cNvSpPr>
-            <a:spLocks noGrp="1"/>
-          </p:cNvSpPr>
-          <p:nvPr>
-            <p:ph type="dt" idx="1"/>
-          </p:nvPr>
-        </p:nvSpPr>
-        <p:spPr>
-          <a:xfrm>
-            <a:off x="3884613" y="0"/>
-            <a:ext cx="2971800" cy="457200"/>
-          </a:xfrm>
-          <a:prstGeom prst="rect">
-            <a:avLst/>
-          </a:prstGeom>
-        </p:spPr>
-        <p:txBody>
-          <a:bodyPr vert="horz" lIns="91440" tIns="45720" rIns="91440" bIns="45720" rtlCol="0"/>
-          <a:lstStyle>
-            <a:lvl1pPr algn="r">
-              <a:defRPr sz="1200"/>
-            </a:lvl1pPr>
-          </a:lstStyle>
-          <a:p>
-            <a:fld id="{0F89C1C7-3DCD-1040-A9CF-14679D8B5DDD}" type="datetimeFigureOut">
-              <a:rPr lang="en-US" smtClean="0"/>
-              <a:t>10/17/16</a:t>
-            </a:fld>
-            <a:endParaRPr lang="en-US"/>
-          </a:p>
-        </p:txBody>
-      </p:sp>
-      <p:sp>
-        <p:nvSpPr>
-          <p:cNvPr id="4" name="Slide Image Placeholder 3"/>
-          <p:cNvSpPr>
-            <a:spLocks noGrp="1" noRot="1" noChangeAspect="1"/>
-          </p:cNvSpPr>
-          <p:nvPr>
-            <p:ph type="sldImg" idx="2"/>
-          </p:nvPr>
-        </p:nvSpPr>
-        <p:spPr>
-          <a:xfrm>
-            <a:off x="1143000" y="685800"/>
-            <a:ext cx="4572000" cy="3429000"/>
-          </a:xfrm>
-          <a:prstGeom prst="rect">
-            <a:avLst/>
-          </a:prstGeom>
-          <a:noFill/>
-          <a:ln w="12700">
-            <a:solidFill>
-              <a:prstClr val="black"/>
-            </a:solidFill>
-          </a:ln>
-        </p:spPr>
-        <p:txBody>
-          <a:bodyPr vert="horz" lIns="91440" tIns="45720" rIns="91440" bIns="45720" rtlCol="0" anchor="ctr"/>
-          <a:lstStyle/>
-          <a:p>
-            <a:endParaRPr lang="en-US"/>
-          </a:p>
-        </p:txBody>
-      </p:sp>
-      <p:sp>
-        <p:nvSpPr>
-          <p:cNvPr id="5" name="Notes Placeholder 4"/>
-          <p:cNvSpPr>
-            <a:spLocks noGrp="1"/>
-          </p:cNvSpPr>
-          <p:nvPr>
-            <p:ph type="body" sz="quarter" idx="3"/>
-          </p:nvPr>
-        </p:nvSpPr>
-        <p:spPr>
-          <a:xfrm>
-            <a:off x="685800" y="4343400"/>
-            <a:ext cx="5486400" cy="4114800"/>
-          </a:xfrm>
-          <a:prstGeom prst="rect">
-            <a:avLst/>
-          </a:prstGeom>
-        </p:spPr>
-        <p:txBody>
-          <a:bodyPr vert="horz" lIns="91440" tIns="45720" rIns="91440" bIns="45720" rtlCol="0"/>
-          <a:lstStyle/>
-          <a:p>
-            <a:pPr lvl="0"/>
-            <a:r>
-              <a:rPr lang="en-US" smtClean="0"/>
-              <a:t>Click to edit Master text styles</a:t>
-            </a:r>
-          </a:p>
-          <a:p>
-            <a:pPr lvl="1"/>
-            <a:r>
-              <a:rPr lang="en-US" smtClean="0"/>
-              <a:t>Second level</a:t>
-            </a:r>
-          </a:p>
-          <a:p>
-            <a:pPr lvl="2"/>
-            <a:r>
-              <a:rPr lang="en-US" smtClean="0"/>
-              <a:t>Third level</a:t>
-            </a:r>
-          </a:p>
-          <a:p>
-            <a:pPr lvl="3"/>
-            <a:r>
-              <a:rPr lang="en-US" smtClean="0"/>
-              <a:t>Fourth level</a:t>
-            </a:r>
-          </a:p>
-          <a:p>
-            <a:pPr lvl="4"/>
-            <a:r>
-              <a:rPr lang="en-US" smtClean="0"/>
-              <a:t>Fifth level</a:t>
-            </a:r>
-            <a:endParaRPr lang="en-US"/>
-          </a:p>
-        </p:txBody>
-      </p:sp>
-      <p:sp>
-        <p:nvSpPr>
-          <p:cNvPr id="6" name="Footer Placeholder 5"/>
-          <p:cNvSpPr>
-            <a:spLocks noGrp="1"/>
-          </p:cNvSpPr>
-          <p:nvPr>
-            <p:ph type="ftr" sz="quarter" idx="4"/>
-          </p:nvPr>
-        </p:nvSpPr>
-        <p:spPr>
-          <a:xfrm>
-            <a:off x="0" y="8685213"/>
-            <a:ext cx="2971800" cy="457200"/>
-          </a:xfrm>
-          <a:prstGeom prst="rect">
-            <a:avLst/>
-          </a:prstGeom>
-        </p:spPr>
-        <p:txBody>
-          <a:bodyPr vert="horz" lIns="91440" tIns="45720" rIns="91440" bIns="45720" rtlCol="0" anchor="b"/>
-          <a:lstStyle>
-            <a:lvl1pPr algn="l">
-              <a:defRPr sz="1200"/>
-            </a:lvl1pPr>
-          </a:lstStyle>
-          <a:p>
-            <a:endParaRPr lang="en-US"/>
-          </a:p>
-        </p:txBody>
-      </p:sp>
-      <p:sp>
-        <p:nvSpPr>
-          <p:cNvPr id="7" name="Slide Number Placeholder 6"/>
-          <p:cNvSpPr>
-            <a:spLocks noGrp="1"/>
-          </p:cNvSpPr>
-          <p:nvPr>
-            <p:ph type="sldNum" sz="quarter" idx="5"/>
-          </p:nvPr>
-        </p:nvSpPr>
-        <p:spPr>
-          <a:xfrm>
-            <a:off x="3884613" y="8685213"/>
-            <a:ext cx="2971800" cy="457200"/>
-          </a:xfrm>
-          <a:prstGeom prst="rect">
-            <a:avLst/>
-          </a:prstGeom>
-        </p:spPr>
-        <p:txBody>
-          <a:bodyPr vert="horz" lIns="91440" tIns="45720" rIns="91440" bIns="45720" rtlCol="0" anchor="b"/>
-          <a:lstStyle>
-            <a:lvl1pPr algn="r">
-              <a:defRPr sz="1200"/>
-            </a:lvl1pPr>
-          </a:lstStyle>
-          <a:p>
-            <a:fld id="{BB5E49A5-4136-284D-997B-48E1D791AD67}" type="slidenum">
-              <a:rPr lang="en-US" smtClean="0"/>
-              <a:t>‹#›</a:t>
-            </a:fld>
-            <a:endParaRPr lang="en-US"/>
-          </a:p>
-        </p:txBody>
-      </p:sp>
-    </p:spTree>
-    <p:extLst>
-      <p:ext uri="{BB962C8B-B14F-4D97-AF65-F5344CB8AC3E}">
-        <p14:creationId xmlns:p14="http://schemas.microsoft.com/office/powerpoint/2010/main" val="2623252185"/>
-      </p:ext>
-    </p:extLst>
-  </p:cSld>
-  <p:clrMap bg1="lt1" tx1="dk1" bg2="lt2" tx2="dk2" accent1="accent1" accent2="accent2" accent3="accent3" accent4="accent4" accent5="accent5" accent6="accent6" hlink="hlink" folHlink="folHlink"/>
-  <p:notesStyle>
-    <a:lvl1pPr marL="0" algn="l" defTabSz="457200" rtl="0" eaLnBrk="1" latinLnBrk="0" hangingPunct="1">
-      <a:defRPr sz="1200" kern="1200">
-        <a:solidFill>
-          <a:schemeClr val="tx1"/>
-        </a:solidFill>
-        <a:latin typeface="+mn-lt"/>
-        <a:ea typeface="+mn-ea"/>
-        <a:cs typeface="+mn-cs"/>
-      </a:defRPr>
-    </a:lvl1pPr>
-    <a:lvl2pPr marL="457200" algn="l" defTabSz="457200" rtl="0" eaLnBrk="1" latinLnBrk="0" hangingPunct="1">
-      <a:defRPr sz="1200" kern="1200">
-        <a:solidFill>
-          <a:schemeClr val="tx1"/>
-        </a:solidFill>
-        <a:latin typeface="+mn-lt"/>
-        <a:ea typeface="+mn-ea"/>
-        <a:cs typeface="+mn-cs"/>
-      </a:defRPr>
-    </a:lvl2pPr>
-    <a:lvl3pPr marL="914400" algn="l" defTabSz="457200" rtl="0" eaLnBrk="1" latinLnBrk="0" hangingPunct="1">
-      <a:defRPr sz="1200" kern="1200">
-        <a:solidFill>
-          <a:schemeClr val="tx1"/>
-        </a:solidFill>
-        <a:latin typeface="+mn-lt"/>
-        <a:ea typeface="+mn-ea"/>
-        <a:cs typeface="+mn-cs"/>
-      </a:defRPr>
-    </a:lvl3pPr>
-    <a:lvl4pPr marL="1371600" algn="l" defTabSz="457200" rtl="0" eaLnBrk="1" latinLnBrk="0" hangingPunct="1">
-      <a:defRPr sz="1200" kern="1200">
-        <a:solidFill>
-          <a:schemeClr val="tx1"/>
-        </a:solidFill>
-        <a:latin typeface="+mn-lt"/>
-        <a:ea typeface="+mn-ea"/>
-        <a:cs typeface="+mn-cs"/>
-      </a:defRPr>
-    </a:lvl4pPr>
-    <a:lvl5pPr marL="1828800" algn="l" defTabSz="457200" rtl="0" eaLnBrk="1" latinLnBrk="0" hangingPunct="1">
-      <a:defRPr sz="1200" kern="1200">
-        <a:solidFill>
-          <a:schemeClr val="tx1"/>
-        </a:solidFill>
-        <a:latin typeface="+mn-lt"/>
-        <a:ea typeface="+mn-ea"/>
-        <a:cs typeface="+mn-cs"/>
-      </a:defRPr>
-    </a:lvl5pPr>
-    <a:lvl6pPr marL="2286000" algn="l" defTabSz="457200" rtl="0" eaLnBrk="1" latinLnBrk="0" hangingPunct="1">
-      <a:defRPr sz="1200" kern="1200">
-        <a:solidFill>
-          <a:schemeClr val="tx1"/>
-        </a:solidFill>
-        <a:latin typeface="+mn-lt"/>
-        <a:ea typeface="+mn-ea"/>
-        <a:cs typeface="+mn-cs"/>
-      </a:defRPr>
-    </a:lvl6pPr>
-    <a:lvl7pPr marL="2743200" algn="l" defTabSz="457200" rtl="0" eaLnBrk="1" latinLnBrk="0" hangingPunct="1">
-      <a:defRPr sz="1200" kern="1200">
-        <a:solidFill>
-          <a:schemeClr val="tx1"/>
-        </a:solidFill>
-        <a:latin typeface="+mn-lt"/>
-        <a:ea typeface="+mn-ea"/>
-        <a:cs typeface="+mn-cs"/>
-      </a:defRPr>
-    </a:lvl7pPr>
-    <a:lvl8pPr marL="3200400" algn="l" defTabSz="457200" rtl="0" eaLnBrk="1" latinLnBrk="0" hangingPunct="1">
-      <a:defRPr sz="1200" kern="1200">
-        <a:solidFill>
-          <a:schemeClr val="tx1"/>
-        </a:solidFill>
-        <a:latin typeface="+mn-lt"/>
-        <a:ea typeface="+mn-ea"/>
-        <a:cs typeface="+mn-cs"/>
-      </a:defRPr>
-    </a:lvl8pPr>
-    <a:lvl9pPr marL="3657600" algn="l" defTabSz="457200" rtl="0" eaLnBrk="1" latinLnBrk="0" hangingPunct="1">
-      <a:defRPr sz="1200" kern="1200">
-        <a:solidFill>
-          <a:schemeClr val="tx1"/>
-        </a:solidFill>
-        <a:latin typeface="+mn-lt"/>
-        <a:ea typeface="+mn-ea"/>
-        <a:cs typeface="+mn-cs"/>
-      </a:defRPr>
-    </a:lvl9pPr>
-  </p:notesStyle>
-</p:notesMaster>
-</file>
-
-<file path=ppt/notesSlides/notesSlide1.xml><?xml version="1.0" encoding="utf-8"?>
-<p:notes xmlns:a="http://schemas.openxmlformats.org/drawingml/2006/main" xmlns:p="http://schemas.openxmlformats.org/presentationml/2006/main" xmlns:r="http://schemas.openxmlformats.org/officeDocument/2006/relationships">
-  <p:cSld>
-    <p:spTree>
-      <p:nvGrpSpPr>
-        <p:cNvPr id="1" name=""/>
-        <p:cNvGrpSpPr/>
-        <p:nvPr/>
-      </p:nvGrpSpPr>
-      <p:grpSpPr>
-        <a:xfrm>
-          <a:off x="0" y="0"/>
-          <a:ext cx="0" cy="0"/>
-          <a:chOff x="0" y="0"/>
-          <a:chExt cx="0" cy="0"/>
-        </a:xfrm>
-      </p:grpSpPr>
-      <p:sp>
-        <p:nvSpPr>
-          <p:cNvPr id="2" name="Slide Image Placeholder 1"/>
-          <p:cNvSpPr>
-            <a:spLocks noGrp="1"/>
-          </p:cNvSpPr>
-          <p:nvPr>
-            <p:ph type="sldImg" idx="2"/>
-          </p:nvPr>
-        </p:nvSpPr>
-        <p:spPr/>
-      </p:sp>
-      <p:sp>
-        <p:nvSpPr>
-          <p:cNvPr id="3" name="Notes Placeholder 2"/>
-          <p:cNvSpPr>
-            <a:spLocks noGrp="1"/>
-          </p:cNvSpPr>
-          <p:nvPr>
-            <p:ph type="body" idx="3" sz="quarter"/>
-          </p:nvPr>
-        </p:nvSpPr>
-        <p:spPr/>
-        <p:txBody>
-          <a:bodyPr/>
-          <a:lstStyle/>
-          <a:p>
-            <a:r>
-              <a:t>Hold 3 seconds on the artwork. Don't read the slide. Go straight to the problem.</a:t>
-            </a:r>
-          </a:p>
-        </p:txBody>
-      </p:sp>
-      <p:sp>
-        <p:nvSpPr>
-          <p:cNvPr id="4" name="Slide Number Placeholder 3"/>
-          <p:cNvSpPr>
-            <a:spLocks noGrp="1"/>
-          </p:cNvSpPr>
-          <p:nvPr>
-            <p:ph type="sldNum" idx="5" sz="quarter"/>
-          </p:nvPr>
-        </p:nvSpPr>
-        <p:spPr/>
-      </p:sp>
-    </p:spTree>
-  </p:cSld>
-  <p:clrMapOvr>
-    <a:masterClrMapping/>
-  </p:clrMapOvr>
-</p:notes>
-</file>
-
-<file path=ppt/notesSlides/notesSlide10.xml><?xml version="1.0" encoding="utf-8"?>
-<p:notes xmlns:a="http://schemas.openxmlformats.org/drawingml/2006/main" xmlns:p="http://schemas.openxmlformats.org/presentationml/2006/main" xmlns:r="http://schemas.openxmlformats.org/officeDocument/2006/relationships">
-  <p:cSld>
-    <p:spTree>
-      <p:nvGrpSpPr>
-        <p:cNvPr id="1" name=""/>
-        <p:cNvGrpSpPr/>
-        <p:nvPr/>
-      </p:nvGrpSpPr>
-      <p:grpSpPr>
-        <a:xfrm>
-          <a:off x="0" y="0"/>
-          <a:ext cx="0" cy="0"/>
-          <a:chOff x="0" y="0"/>
-          <a:chExt cx="0" cy="0"/>
-        </a:xfrm>
-      </p:grpSpPr>
-      <p:sp>
-        <p:nvSpPr>
-          <p:cNvPr id="2" name="Slide Image Placeholder 1"/>
-          <p:cNvSpPr>
-            <a:spLocks noGrp="1"/>
-          </p:cNvSpPr>
-          <p:nvPr>
-            <p:ph type="sldImg" idx="2"/>
-          </p:nvPr>
-        </p:nvSpPr>
-        <p:spPr/>
-      </p:sp>
-      <p:sp>
-        <p:nvSpPr>
-          <p:cNvPr id="3" name="Notes Placeholder 2"/>
-          <p:cNvSpPr>
-            <a:spLocks noGrp="1"/>
-          </p:cNvSpPr>
-          <p:nvPr>
-            <p:ph type="body" idx="3" sz="quarter"/>
-          </p:nvPr>
-        </p:nvSpPr>
-        <p:spPr/>
-        <p:txBody>
-          <a:bodyPr/>
-          <a:lstStyle/>
-          <a:p>
-            <a:r>
-              <a:t>Optional but strong. Shows we tested adversarially rather than demoed happy paths.</a:t>
-            </a:r>
-          </a:p>
-        </p:txBody>
-      </p:sp>
-      <p:sp>
-        <p:nvSpPr>
-          <p:cNvPr id="4" name="Slide Number Placeholder 3"/>
-          <p:cNvSpPr>
-            <a:spLocks noGrp="1"/>
-          </p:cNvSpPr>
-          <p:nvPr>
-            <p:ph type="sldNum" idx="5" sz="quarter"/>
-          </p:nvPr>
-        </p:nvSpPr>
-        <p:spPr/>
-      </p:sp>
-    </p:spTree>
-  </p:cSld>
-  <p:clrMapOvr>
-    <a:masterClrMapping/>
-  </p:clrMapOvr>
-</p:notes>
-</file>
-
-<file path=ppt/notesSlides/notesSlide11.xml><?xml version="1.0" encoding="utf-8"?>
-<p:notes xmlns:a="http://schemas.openxmlformats.org/drawingml/2006/main" xmlns:p="http://schemas.openxmlformats.org/presentationml/2006/main" xmlns:r="http://schemas.openxmlformats.org/officeDocument/2006/relationships">
-  <p:cSld>
-    <p:spTree>
-      <p:nvGrpSpPr>
-        <p:cNvPr id="1" name=""/>
-        <p:cNvGrpSpPr/>
-        <p:nvPr/>
-      </p:nvGrpSpPr>
-      <p:grpSpPr>
-        <a:xfrm>
-          <a:off x="0" y="0"/>
-          <a:ext cx="0" cy="0"/>
-          <a:chOff x="0" y="0"/>
-          <a:chExt cx="0" cy="0"/>
-        </a:xfrm>
-      </p:grpSpPr>
-      <p:sp>
-        <p:nvSpPr>
-          <p:cNvPr id="2" name="Slide Image Placeholder 1"/>
-          <p:cNvSpPr>
-            <a:spLocks noGrp="1"/>
-          </p:cNvSpPr>
-          <p:nvPr>
-            <p:ph type="sldImg" idx="2"/>
-          </p:nvPr>
-        </p:nvSpPr>
-        <p:spPr/>
-      </p:sp>
-      <p:sp>
-        <p:nvSpPr>
-          <p:cNvPr id="3" name="Notes Placeholder 2"/>
-          <p:cNvSpPr>
-            <a:spLocks noGrp="1"/>
-          </p:cNvSpPr>
-          <p:nvPr>
-            <p:ph type="body" idx="3" sz="quarter"/>
-          </p:nvPr>
-        </p:nvSpPr>
-        <p:spPr/>
-        <p:txBody>
-          <a:bodyPr/>
-          <a:lstStyle/>
-          <a:p>
-            <a:r>
-              <a:t>Use as the emotional beat before the call to action, or as the closing hold.</a:t>
-            </a:r>
-          </a:p>
-        </p:txBody>
-      </p:sp>
-      <p:sp>
-        <p:nvSpPr>
-          <p:cNvPr id="4" name="Slide Number Placeholder 3"/>
-          <p:cNvSpPr>
-            <a:spLocks noGrp="1"/>
-          </p:cNvSpPr>
-          <p:nvPr>
-            <p:ph type="sldNum" idx="5" sz="quarter"/>
-          </p:nvPr>
-        </p:nvSpPr>
-        <p:spPr/>
-      </p:sp>
-    </p:spTree>
-  </p:cSld>
-  <p:clrMapOvr>
-    <a:masterClrMapping/>
-  </p:clrMapOvr>
-</p:notes>
-</file>
-
-<file path=ppt/notesSlides/notesSlide12.xml><?xml version="1.0" encoding="utf-8"?>
-<p:notes xmlns:a="http://schemas.openxmlformats.org/drawingml/2006/main" xmlns:p="http://schemas.openxmlformats.org/presentationml/2006/main" xmlns:r="http://schemas.openxmlformats.org/officeDocument/2006/relationships">
-  <p:cSld>
-    <p:spTree>
-      <p:nvGrpSpPr>
-        <p:cNvPr id="1" name=""/>
-        <p:cNvGrpSpPr/>
-        <p:nvPr/>
-      </p:nvGrpSpPr>
-      <p:grpSpPr>
-        <a:xfrm>
-          <a:off x="0" y="0"/>
-          <a:ext cx="0" cy="0"/>
-          <a:chOff x="0" y="0"/>
-          <a:chExt cx="0" cy="0"/>
-        </a:xfrm>
-      </p:grpSpPr>
-      <p:sp>
-        <p:nvSpPr>
-          <p:cNvPr id="2" name="Slide Image Placeholder 1"/>
-          <p:cNvSpPr>
-            <a:spLocks noGrp="1"/>
-          </p:cNvSpPr>
-          <p:nvPr>
-            <p:ph type="sldImg" idx="2"/>
-          </p:nvPr>
-        </p:nvSpPr>
-        <p:spPr/>
-      </p:sp>
-      <p:sp>
-        <p:nvSpPr>
-          <p:cNvPr id="3" name="Notes Placeholder 2"/>
-          <p:cNvSpPr>
-            <a:spLocks noGrp="1"/>
-          </p:cNvSpPr>
-          <p:nvPr>
-            <p:ph type="body" idx="3" sz="quarter"/>
-          </p:nvPr>
-        </p:nvSpPr>
-        <p:spPr/>
-        <p:txBody>
-          <a:bodyPr/>
-          <a:lstStyle/>
-          <a:p>
-            <a:r>
-              <a:t>End here. Leave it on screen while you close.</a:t>
-            </a:r>
-          </a:p>
-        </p:txBody>
-      </p:sp>
-      <p:sp>
-        <p:nvSpPr>
-          <p:cNvPr id="4" name="Slide Number Placeholder 3"/>
-          <p:cNvSpPr>
-            <a:spLocks noGrp="1"/>
-          </p:cNvSpPr>
-          <p:nvPr>
-            <p:ph type="sldNum" idx="5" sz="quarter"/>
-          </p:nvPr>
-        </p:nvSpPr>
-        <p:spPr/>
-      </p:sp>
-    </p:spTree>
-  </p:cSld>
-  <p:clrMapOvr>
-    <a:masterClrMapping/>
-  </p:clrMapOvr>
-</p:notes>
-</file>
-
-<file path=ppt/notesSlides/notesSlide2.xml><?xml version="1.0" encoding="utf-8"?>
-<p:notes xmlns:a="http://schemas.openxmlformats.org/drawingml/2006/main" xmlns:p="http://schemas.openxmlformats.org/presentationml/2006/main" xmlns:r="http://schemas.openxmlformats.org/officeDocument/2006/relationships">
-  <p:cSld>
-    <p:spTree>
-      <p:nvGrpSpPr>
-        <p:cNvPr id="1" name=""/>
-        <p:cNvGrpSpPr/>
-        <p:nvPr/>
-      </p:nvGrpSpPr>
-      <p:grpSpPr>
-        <a:xfrm>
-          <a:off x="0" y="0"/>
-          <a:ext cx="0" cy="0"/>
-          <a:chOff x="0" y="0"/>
-          <a:chExt cx="0" cy="0"/>
-        </a:xfrm>
-      </p:grpSpPr>
-      <p:sp>
-        <p:nvSpPr>
-          <p:cNvPr id="2" name="Slide Image Placeholder 1"/>
-          <p:cNvSpPr>
-            <a:spLocks noGrp="1"/>
-          </p:cNvSpPr>
-          <p:nvPr>
-            <p:ph type="sldImg" idx="2"/>
-          </p:nvPr>
-        </p:nvSpPr>
-        <p:spPr/>
-      </p:sp>
-      <p:sp>
-        <p:nvSpPr>
-          <p:cNvPr id="3" name="Notes Placeholder 2"/>
-          <p:cNvSpPr>
-            <a:spLocks noGrp="1"/>
-          </p:cNvSpPr>
-          <p:nvPr>
-            <p:ph type="body" idx="3" sz="quarter"/>
-          </p:nvPr>
-        </p:nvSpPr>
-        <p:spPr/>
-        <p:txBody>
-          <a:bodyPr/>
-          <a:lstStyle/>
-          <a:p>
-            <a:r>
-              <a:t>Screen: the live advisory page, scrolled to these sentences. Let them be read. Say: 'these are not in any database — they're prose on a web page.'</a:t>
-            </a:r>
-          </a:p>
-        </p:txBody>
-      </p:sp>
-      <p:sp>
-        <p:nvSpPr>
-          <p:cNvPr id="4" name="Slide Number Placeholder 3"/>
-          <p:cNvSpPr>
-            <a:spLocks noGrp="1"/>
-          </p:cNvSpPr>
-          <p:nvPr>
-            <p:ph type="sldNum" idx="5" sz="quarter"/>
-          </p:nvPr>
-        </p:nvSpPr>
-        <p:spPr/>
-      </p:sp>
-    </p:spTree>
-  </p:cSld>
-  <p:clrMapOvr>
-    <a:masterClrMapping/>
-  </p:clrMapOvr>
-</p:notes>
-</file>
-
-<file path=ppt/notesSlides/notesSlide3.xml><?xml version="1.0" encoding="utf-8"?>
-<p:notes xmlns:a="http://schemas.openxmlformats.org/drawingml/2006/main" xmlns:p="http://schemas.openxmlformats.org/presentationml/2006/main" xmlns:r="http://schemas.openxmlformats.org/officeDocument/2006/relationships">
-  <p:cSld>
-    <p:spTree>
-      <p:nvGrpSpPr>
-        <p:cNvPr id="1" name=""/>
-        <p:cNvGrpSpPr/>
-        <p:nvPr/>
-      </p:nvGrpSpPr>
-      <p:grpSpPr>
-        <a:xfrm>
-          <a:off x="0" y="0"/>
-          <a:ext cx="0" cy="0"/>
-          <a:chOff x="0" y="0"/>
-          <a:chExt cx="0" cy="0"/>
-        </a:xfrm>
-      </p:grpSpPr>
-      <p:sp>
-        <p:nvSpPr>
-          <p:cNvPr id="2" name="Slide Image Placeholder 1"/>
-          <p:cNvSpPr>
-            <a:spLocks noGrp="1"/>
-          </p:cNvSpPr>
-          <p:nvPr>
-            <p:ph type="sldImg" idx="2"/>
-          </p:nvPr>
-        </p:nvSpPr>
-        <p:spPr/>
-      </p:sp>
-      <p:sp>
-        <p:nvSpPr>
-          <p:cNvPr id="3" name="Notes Placeholder 2"/>
-          <p:cNvSpPr>
-            <a:spLocks noGrp="1"/>
-          </p:cNvSpPr>
-          <p:nvPr>
-            <p:ph type="body" idx="3" sz="quarter"/>
-          </p:nvPr>
-        </p:nvSpPr>
-        <p:spPr/>
-        <p:txBody>
-          <a:bodyPr/>
-          <a:lstStyle/>
-          <a:p>
-            <a:r>
-              <a:t>Screen: phone on /talk. Say the PNR out loud. Then P3L8QK. The contrast IS the pitch — same destination, opposite answer.</a:t>
-            </a:r>
-          </a:p>
-        </p:txBody>
-      </p:sp>
-      <p:sp>
-        <p:nvSpPr>
-          <p:cNvPr id="4" name="Slide Number Placeholder 3"/>
-          <p:cNvSpPr>
-            <a:spLocks noGrp="1"/>
-          </p:cNvSpPr>
-          <p:nvPr>
-            <p:ph type="sldNum" idx="5" sz="quarter"/>
-          </p:nvPr>
-        </p:nvSpPr>
-        <p:spPr/>
-      </p:sp>
-    </p:spTree>
-  </p:cSld>
-  <p:clrMapOvr>
-    <a:masterClrMapping/>
-  </p:clrMapOvr>
-</p:notes>
-</file>
-
-<file path=ppt/notesSlides/notesSlide4.xml><?xml version="1.0" encoding="utf-8"?>
-<p:notes xmlns:a="http://schemas.openxmlformats.org/drawingml/2006/main" xmlns:p="http://schemas.openxmlformats.org/presentationml/2006/main" xmlns:r="http://schemas.openxmlformats.org/officeDocument/2006/relationships">
-  <p:cSld>
-    <p:spTree>
-      <p:nvGrpSpPr>
-        <p:cNvPr id="1" name=""/>
-        <p:cNvGrpSpPr/>
-        <p:nvPr/>
-      </p:nvGrpSpPr>
-      <p:grpSpPr>
-        <a:xfrm>
-          <a:off x="0" y="0"/>
-          <a:ext cx="0" cy="0"/>
-          <a:chOff x="0" y="0"/>
-          <a:chExt cx="0" cy="0"/>
-        </a:xfrm>
-      </p:grpSpPr>
-      <p:sp>
-        <p:nvSpPr>
-          <p:cNvPr id="2" name="Slide Image Placeholder 1"/>
-          <p:cNvSpPr>
-            <a:spLocks noGrp="1"/>
-          </p:cNvSpPr>
-          <p:nvPr>
-            <p:ph type="sldImg" idx="2"/>
-          </p:nvPr>
-        </p:nvSpPr>
-        <p:spPr/>
-      </p:sp>
-      <p:sp>
-        <p:nvSpPr>
-          <p:cNvPr id="3" name="Notes Placeholder 2"/>
-          <p:cNvSpPr>
-            <a:spLocks noGrp="1"/>
-          </p:cNvSpPr>
-          <p:nvPr>
-            <p:ph type="body" idx="3" sz="quarter"/>
-          </p:nvPr>
-        </p:nvSpPr>
-        <p:spPr/>
-        <p:txBody>
-          <a:bodyPr/>
-          <a:lstStyle/>
-          <a:p>
-            <a:r>
-              <a:t>Point at the ONE arrow pointing back in — the context.dev monitor webhook. Everything else is request/response; that is a push.</a:t>
-            </a:r>
-          </a:p>
-        </p:txBody>
-      </p:sp>
-      <p:sp>
-        <p:nvSpPr>
-          <p:cNvPr id="4" name="Slide Number Placeholder 3"/>
-          <p:cNvSpPr>
-            <a:spLocks noGrp="1"/>
-          </p:cNvSpPr>
-          <p:nvPr>
-            <p:ph type="sldNum" idx="5" sz="quarter"/>
-          </p:nvPr>
-        </p:nvSpPr>
-        <p:spPr/>
-      </p:sp>
-    </p:spTree>
-  </p:cSld>
-  <p:clrMapOvr>
-    <a:masterClrMapping/>
-  </p:clrMapOvr>
-</p:notes>
-</file>
-
-<file path=ppt/notesSlides/notesSlide5.xml><?xml version="1.0" encoding="utf-8"?>
-<p:notes xmlns:a="http://schemas.openxmlformats.org/drawingml/2006/main" xmlns:p="http://schemas.openxmlformats.org/presentationml/2006/main" xmlns:r="http://schemas.openxmlformats.org/officeDocument/2006/relationships">
-  <p:cSld>
-    <p:spTree>
-      <p:nvGrpSpPr>
-        <p:cNvPr id="1" name=""/>
-        <p:cNvGrpSpPr/>
-        <p:nvPr/>
-      </p:nvGrpSpPr>
-      <p:grpSpPr>
-        <a:xfrm>
-          <a:off x="0" y="0"/>
-          <a:ext cx="0" cy="0"/>
-          <a:chOff x="0" y="0"/>
-          <a:chExt cx="0" cy="0"/>
-        </a:xfrm>
-      </p:grpSpPr>
-      <p:sp>
-        <p:nvSpPr>
-          <p:cNvPr id="2" name="Slide Image Placeholder 1"/>
-          <p:cNvSpPr>
-            <a:spLocks noGrp="1"/>
-          </p:cNvSpPr>
-          <p:nvPr>
-            <p:ph type="sldImg" idx="2"/>
-          </p:nvPr>
-        </p:nvSpPr>
-        <p:spPr/>
-      </p:sp>
-      <p:sp>
-        <p:nvSpPr>
-          <p:cNvPr id="3" name="Notes Placeholder 2"/>
-          <p:cNvSpPr>
-            <a:spLocks noGrp="1"/>
-          </p:cNvSpPr>
-          <p:nvPr>
-            <p:ph type="body" idx="3" sz="quarter"/>
-          </p:nvPr>
-        </p:nvSpPr>
-        <p:spPr/>
-        <p:txBody>
-          <a:bodyPr/>
-          <a:lstStyle/>
-          <a:p>
-            <a:r>
-              <a:t>Zoom on the parallel block while saying: one booking reference, five live sources, one decision.</a:t>
-            </a:r>
-          </a:p>
-        </p:txBody>
-      </p:sp>
-      <p:sp>
-        <p:nvSpPr>
-          <p:cNvPr id="4" name="Slide Number Placeholder 3"/>
-          <p:cNvSpPr>
-            <a:spLocks noGrp="1"/>
-          </p:cNvSpPr>
-          <p:nvPr>
-            <p:ph type="sldNum" idx="5" sz="quarter"/>
-          </p:nvPr>
-        </p:nvSpPr>
-        <p:spPr/>
-      </p:sp>
-    </p:spTree>
-  </p:cSld>
-  <p:clrMapOvr>
-    <a:masterClrMapping/>
-  </p:clrMapOvr>
-</p:notes>
-</file>
-
-<file path=ppt/notesSlides/notesSlide6.xml><?xml version="1.0" encoding="utf-8"?>
-<p:notes xmlns:a="http://schemas.openxmlformats.org/drawingml/2006/main" xmlns:p="http://schemas.openxmlformats.org/presentationml/2006/main" xmlns:r="http://schemas.openxmlformats.org/officeDocument/2006/relationships">
-  <p:cSld>
-    <p:spTree>
-      <p:nvGrpSpPr>
-        <p:cNvPr id="1" name=""/>
-        <p:cNvGrpSpPr/>
-        <p:nvPr/>
-      </p:nvGrpSpPr>
-      <p:grpSpPr>
-        <a:xfrm>
-          <a:off x="0" y="0"/>
-          <a:ext cx="0" cy="0"/>
-          <a:chOff x="0" y="0"/>
-          <a:chExt cx="0" cy="0"/>
-        </a:xfrm>
-      </p:grpSpPr>
-      <p:sp>
-        <p:nvSpPr>
-          <p:cNvPr id="2" name="Slide Image Placeholder 1"/>
-          <p:cNvSpPr>
-            <a:spLocks noGrp="1"/>
-          </p:cNvSpPr>
-          <p:nvPr>
-            <p:ph type="sldImg" idx="2"/>
-          </p:nvPr>
-        </p:nvSpPr>
-        <p:spPr/>
-      </p:sp>
-      <p:sp>
-        <p:nvSpPr>
-          <p:cNvPr id="3" name="Notes Placeholder 2"/>
-          <p:cNvSpPr>
-            <a:spLocks noGrp="1"/>
-          </p:cNvSpPr>
-          <p:nvPr>
-            <p:ph type="body" idx="3" sz="quarter"/>
-          </p:nvPr>
-        </p:nvSpPr>
-        <p:spPr/>
-        <p:txBody>
-          <a:bodyPr/>
-          <a:lstStyle/>
-          <a:p>
-            <a:r>
-              <a:t>This is the slide that separates us from a chatbot with a search box. Every one of these is pinned by a test against verbatim page text.</a:t>
-            </a:r>
-          </a:p>
-        </p:txBody>
-      </p:sp>
-      <p:sp>
-        <p:nvSpPr>
-          <p:cNvPr id="4" name="Slide Number Placeholder 3"/>
-          <p:cNvSpPr>
-            <a:spLocks noGrp="1"/>
-          </p:cNvSpPr>
-          <p:nvPr>
-            <p:ph type="sldNum" idx="5" sz="quarter"/>
-          </p:nvPr>
-        </p:nvSpPr>
-        <p:spPr/>
-      </p:sp>
-    </p:spTree>
-  </p:cSld>
-  <p:clrMapOvr>
-    <a:masterClrMapping/>
-  </p:clrMapOvr>
-</p:notes>
-</file>
-
-<file path=ppt/notesSlides/notesSlide7.xml><?xml version="1.0" encoding="utf-8"?>
-<p:notes xmlns:a="http://schemas.openxmlformats.org/drawingml/2006/main" xmlns:p="http://schemas.openxmlformats.org/presentationml/2006/main" xmlns:r="http://schemas.openxmlformats.org/officeDocument/2006/relationships">
-  <p:cSld>
-    <p:spTree>
-      <p:nvGrpSpPr>
-        <p:cNvPr id="1" name=""/>
-        <p:cNvGrpSpPr/>
-        <p:nvPr/>
-      </p:nvGrpSpPr>
-      <p:grpSpPr>
-        <a:xfrm>
-          <a:off x="0" y="0"/>
-          <a:ext cx="0" cy="0"/>
-          <a:chOff x="0" y="0"/>
-          <a:chExt cx="0" cy="0"/>
-        </a:xfrm>
-      </p:grpSpPr>
-      <p:sp>
-        <p:nvSpPr>
-          <p:cNvPr id="2" name="Slide Image Placeholder 1"/>
-          <p:cNvSpPr>
-            <a:spLocks noGrp="1"/>
-          </p:cNvSpPr>
-          <p:nvPr>
-            <p:ph type="sldImg" idx="2"/>
-          </p:nvPr>
-        </p:nvSpPr>
-        <p:spPr/>
-      </p:sp>
-      <p:sp>
-        <p:nvSpPr>
-          <p:cNvPr id="3" name="Notes Placeholder 2"/>
-          <p:cNvSpPr>
-            <a:spLocks noGrp="1"/>
-          </p:cNvSpPr>
-          <p:nvPr>
-            <p:ph type="body" idx="3" sz="quarter"/>
-          </p:nvPr>
-        </p:nvSpPr>
-        <p:spPr/>
-        <p:txBody>
-          <a:bodyPr/>
-          <a:lstStyle/>
-          <a:p>
-            <a:r>
-              <a:t>Pick ONE to demo live: change detection, airspace snapshot, the card-number guardrail, or Arabic. Not all four.</a:t>
-            </a:r>
-          </a:p>
-        </p:txBody>
-      </p:sp>
-      <p:sp>
-        <p:nvSpPr>
-          <p:cNvPr id="4" name="Slide Number Placeholder 3"/>
-          <p:cNvSpPr>
-            <a:spLocks noGrp="1"/>
-          </p:cNvSpPr>
-          <p:nvPr>
-            <p:ph type="sldNum" idx="5" sz="quarter"/>
-          </p:nvPr>
-        </p:nvSpPr>
-        <p:spPr/>
-      </p:sp>
-    </p:spTree>
-  </p:cSld>
-  <p:clrMapOvr>
-    <a:masterClrMapping/>
-  </p:clrMapOvr>
-</p:notes>
-</file>
-
-<file path=ppt/notesSlides/notesSlide8.xml><?xml version="1.0" encoding="utf-8"?>
-<p:notes xmlns:a="http://schemas.openxmlformats.org/drawingml/2006/main" xmlns:p="http://schemas.openxmlformats.org/presentationml/2006/main" xmlns:r="http://schemas.openxmlformats.org/officeDocument/2006/relationships">
-  <p:cSld>
-    <p:spTree>
-      <p:nvGrpSpPr>
-        <p:cNvPr id="1" name=""/>
-        <p:cNvGrpSpPr/>
-        <p:nvPr/>
-      </p:nvGrpSpPr>
-      <p:grpSpPr>
-        <a:xfrm>
-          <a:off x="0" y="0"/>
-          <a:ext cx="0" cy="0"/>
-          <a:chOff x="0" y="0"/>
-          <a:chExt cx="0" cy="0"/>
-        </a:xfrm>
-      </p:grpSpPr>
-      <p:sp>
-        <p:nvSpPr>
-          <p:cNvPr id="2" name="Slide Image Placeholder 1"/>
-          <p:cNvSpPr>
-            <a:spLocks noGrp="1"/>
-          </p:cNvSpPr>
-          <p:nvPr>
-            <p:ph type="sldImg" idx="2"/>
-          </p:nvPr>
-        </p:nvSpPr>
-        <p:spPr/>
-      </p:sp>
-      <p:sp>
-        <p:nvSpPr>
-          <p:cNvPr id="3" name="Notes Placeholder 2"/>
-          <p:cNvSpPr>
-            <a:spLocks noGrp="1"/>
-          </p:cNvSpPr>
-          <p:nvPr>
-            <p:ph type="body" idx="3" sz="quarter"/>
-          </p:nvPr>
-        </p:nvSpPr>
-        <p:spPr/>
-        <p:txBody>
-          <a:bodyPr/>
-          <a:lstStyle/>
-          <a:p>
-            <a:r>
-              <a:t>Say this before a judge asks. Overclaiming is explicitly penalised; naming limits reads as engineering maturity.</a:t>
-            </a:r>
-          </a:p>
-        </p:txBody>
-      </p:sp>
-      <p:sp>
-        <p:nvSpPr>
-          <p:cNvPr id="4" name="Slide Number Placeholder 3"/>
-          <p:cNvSpPr>
-            <a:spLocks noGrp="1"/>
-          </p:cNvSpPr>
-          <p:nvPr>
-            <p:ph type="sldNum" idx="5" sz="quarter"/>
-          </p:nvPr>
-        </p:nvSpPr>
-        <p:spPr/>
-      </p:sp>
-    </p:spTree>
-  </p:cSld>
-  <p:clrMapOvr>
-    <a:masterClrMapping/>
-  </p:clrMapOvr>
-</p:notes>
-</file>
-
-<file path=ppt/notesSlides/notesSlide9.xml><?xml version="1.0" encoding="utf-8"?>
-<p:notes xmlns:a="http://schemas.openxmlformats.org/drawingml/2006/main" xmlns:p="http://schemas.openxmlformats.org/presentationml/2006/main" xmlns:r="http://schemas.openxmlformats.org/officeDocument/2006/relationships">
-  <p:cSld>
-    <p:spTree>
-      <p:nvGrpSpPr>
-        <p:cNvPr id="1" name=""/>
-        <p:cNvGrpSpPr/>
-        <p:nvPr/>
-      </p:nvGrpSpPr>
-      <p:grpSpPr>
-        <a:xfrm>
-          <a:off x="0" y="0"/>
-          <a:ext cx="0" cy="0"/>
-          <a:chOff x="0" y="0"/>
-          <a:chExt cx="0" cy="0"/>
-        </a:xfrm>
-      </p:grpSpPr>
-      <p:sp>
-        <p:nvSpPr>
-          <p:cNvPr id="2" name="Slide Image Placeholder 1"/>
-          <p:cNvSpPr>
-            <a:spLocks noGrp="1"/>
-          </p:cNvSpPr>
-          <p:nvPr>
-            <p:ph type="sldImg" idx="2"/>
-          </p:nvPr>
-        </p:nvSpPr>
-        <p:spPr/>
-      </p:sp>
-      <p:sp>
-        <p:nvSpPr>
-          <p:cNvPr id="3" name="Notes Placeholder 2"/>
-          <p:cNvSpPr>
-            <a:spLocks noGrp="1"/>
-          </p:cNvSpPr>
-          <p:nvPr>
-            <p:ph type="body" idx="3" sz="quarter"/>
-          </p:nvPr>
-        </p:nvSpPr>
-        <p:spPr/>
-        <p:txBody>
-          <a:bodyPr/>
-          <a:lstStyle/>
-          <a:p>
-            <a:r>
-              <a:t>Reserve slide. Use if judges probe on robustness or security.</a:t>
-            </a:r>
-          </a:p>
-        </p:txBody>
-      </p:sp>
-      <p:sp>
-        <p:nvSpPr>
-          <p:cNvPr id="4" name="Slide Number Placeholder 3"/>
-          <p:cNvSpPr>
-            <a:spLocks noGrp="1"/>
-          </p:cNvSpPr>
-          <p:nvPr>
-            <p:ph type="sldNum" idx="5" sz="quarter"/>
-          </p:nvPr>
-        </p:nvSpPr>
-        <p:spPr/>
-      </p:sp>
-    </p:spTree>
-  </p:cSld>
-  <p:clrMapOvr>
-    <a:masterClrMapping/>
-  </p:clrMapOvr>
-</p:notes>
 </file>
 
 <file path=ppt/slideLayouts/slideLayout1.xml><?xml version="1.0" encoding="utf-8"?>
@@ -4309,7 +3119,6 @@
           <a:ln>
             <a:noFill/>
           </a:ln>
-          <a:effectLst/>
         </p:spPr>
         <p:style>
           <a:lnRef idx="1">
@@ -4372,14 +3181,11 @@
             <a:avLst/>
           </a:prstGeom>
           <a:solidFill>
-            <a:srgbClr val="101012">
-              <a:alpha val="72000"/>
-            </a:srgbClr>
+            <a:srgbClr val="121418"/>
           </a:solidFill>
           <a:ln>
             <a:noFill/>
           </a:ln>
-          <a:effectLst/>
         </p:spPr>
         <p:style>
           <a:lnRef idx="1">
@@ -4672,7 +3478,6 @@
           <a:ln>
             <a:noFill/>
           </a:ln>
-          <a:effectLst/>
         </p:spPr>
         <p:style>
           <a:lnRef idx="1">
@@ -4734,7 +3539,6 @@
           <a:ln>
             <a:noFill/>
           </a:ln>
-          <a:effectLst/>
         </p:spPr>
         <p:style>
           <a:lnRef idx="1">
@@ -4778,7 +3582,6 @@
           <a:ln>
             <a:noFill/>
           </a:ln>
-          <a:effectLst/>
         </p:spPr>
         <p:style>
           <a:lnRef idx="1">
@@ -4930,7 +3733,6 @@
           <a:ln>
             <a:noFill/>
           </a:ln>
-          <a:effectLst/>
         </p:spPr>
         <p:style>
           <a:lnRef idx="1">
@@ -4974,7 +3776,6 @@
           <a:ln>
             <a:noFill/>
           </a:ln>
-          <a:effectLst/>
         </p:spPr>
         <p:style>
           <a:lnRef idx="1">
@@ -5066,7 +3867,6 @@
           <a:ln>
             <a:noFill/>
           </a:ln>
-          <a:effectLst/>
         </p:spPr>
         <p:style>
           <a:lnRef idx="1">
@@ -5176,7 +3976,6 @@
           <a:ln>
             <a:noFill/>
           </a:ln>
-          <a:effectLst/>
         </p:spPr>
         <p:style>
           <a:lnRef idx="1">
@@ -5239,14 +4038,11 @@
             <a:avLst/>
           </a:prstGeom>
           <a:solidFill>
-            <a:srgbClr val="101012">
-              <a:alpha val="78000"/>
-            </a:srgbClr>
+            <a:srgbClr val="121418"/>
           </a:solidFill>
           <a:ln>
             <a:noFill/>
           </a:ln>
-          <a:effectLst/>
         </p:spPr>
         <p:style>
           <a:lnRef idx="1">
@@ -5393,7 +4189,6 @@
           <a:ln>
             <a:noFill/>
           </a:ln>
-          <a:effectLst/>
         </p:spPr>
         <p:style>
           <a:lnRef idx="1">
@@ -5455,7 +4250,6 @@
           <a:ln>
             <a:noFill/>
           </a:ln>
-          <a:effectLst/>
         </p:spPr>
         <p:style>
           <a:lnRef idx="1">
@@ -5499,7 +4293,6 @@
           <a:ln>
             <a:noFill/>
           </a:ln>
-          <a:effectLst/>
         </p:spPr>
         <p:style>
           <a:lnRef idx="1">
@@ -5543,7 +4336,6 @@
           <a:ln>
             <a:noFill/>
           </a:ln>
-          <a:effectLst/>
         </p:spPr>
         <p:style>
           <a:lnRef idx="1">
@@ -5797,7 +4589,6 @@
           <a:ln>
             <a:noFill/>
           </a:ln>
-          <a:effectLst/>
         </p:spPr>
         <p:style>
           <a:lnRef idx="1">
@@ -5841,7 +4632,6 @@
           <a:ln>
             <a:noFill/>
           </a:ln>
-          <a:effectLst/>
         </p:spPr>
         <p:style>
           <a:lnRef idx="1">
@@ -5993,7 +4783,6 @@
           <a:ln>
             <a:noFill/>
           </a:ln>
-          <a:effectLst/>
         </p:spPr>
         <p:style>
           <a:lnRef idx="1">
@@ -6178,7 +4967,6 @@
           <a:ln>
             <a:noFill/>
           </a:ln>
-          <a:effectLst/>
         </p:spPr>
         <p:style>
           <a:lnRef idx="1">
@@ -6270,7 +5058,6 @@
           <a:ln>
             <a:noFill/>
           </a:ln>
-          <a:effectLst/>
         </p:spPr>
         <p:style>
           <a:lnRef idx="1">
@@ -6362,7 +5149,6 @@
           <a:ln>
             <a:noFill/>
           </a:ln>
-          <a:effectLst/>
         </p:spPr>
         <p:style>
           <a:lnRef idx="1">
@@ -6472,7 +5258,6 @@
           <a:ln>
             <a:noFill/>
           </a:ln>
-          <a:effectLst/>
         </p:spPr>
         <p:style>
           <a:lnRef idx="1">
@@ -6516,7 +5301,6 @@
           <a:ln>
             <a:noFill/>
           </a:ln>
-          <a:effectLst/>
         </p:spPr>
         <p:style>
           <a:lnRef idx="1">
@@ -6668,7 +5452,6 @@
           <a:ln>
             <a:noFill/>
           </a:ln>
-          <a:effectLst/>
         </p:spPr>
         <p:style>
           <a:lnRef idx="1">
@@ -6754,7 +5537,6 @@
           <a:ln>
             <a:noFill/>
           </a:ln>
-          <a:effectLst/>
         </p:spPr>
         <p:style>
           <a:lnRef idx="1">
@@ -6846,7 +5628,6 @@
           <a:ln>
             <a:noFill/>
           </a:ln>
-          <a:effectLst/>
         </p:spPr>
         <p:style>
           <a:lnRef idx="1">
@@ -6938,7 +5719,6 @@
           <a:ln>
             <a:noFill/>
           </a:ln>
-          <a:effectLst/>
         </p:spPr>
         <p:style>
           <a:lnRef idx="1">
@@ -7030,7 +5810,6 @@
           <a:ln>
             <a:noFill/>
           </a:ln>
-          <a:effectLst/>
         </p:spPr>
         <p:style>
           <a:lnRef idx="1">
@@ -7122,7 +5901,6 @@
           <a:ln>
             <a:noFill/>
           </a:ln>
-          <a:effectLst/>
         </p:spPr>
         <p:style>
           <a:lnRef idx="1">
@@ -7216,7 +5994,6 @@
               <a:srgbClr val="C39C57"/>
             </a:solidFill>
           </a:ln>
-          <a:effectLst/>
         </p:spPr>
         <p:style>
           <a:lnRef idx="1">
@@ -7339,7 +6116,6 @@
           <a:ln>
             <a:noFill/>
           </a:ln>
-          <a:effectLst/>
         </p:spPr>
         <p:style>
           <a:lnRef idx="1">
@@ -7383,7 +6159,6 @@
           <a:ln>
             <a:noFill/>
           </a:ln>
-          <a:effectLst/>
         </p:spPr>
         <p:style>
           <a:lnRef idx="1">
@@ -7535,7 +6310,6 @@
           <a:ln>
             <a:noFill/>
           </a:ln>
-          <a:effectLst/>
         </p:spPr>
         <p:style>
           <a:lnRef idx="1">
@@ -7621,7 +6395,6 @@
           <a:ln>
             <a:noFill/>
           </a:ln>
-          <a:effectLst/>
         </p:spPr>
         <p:style>
           <a:lnRef idx="1">
@@ -7665,7 +6438,6 @@
           <a:ln>
             <a:noFill/>
           </a:ln>
-          <a:effectLst/>
         </p:spPr>
         <p:style>
           <a:lnRef idx="1">
@@ -7817,7 +6589,6 @@
           <a:ln>
             <a:noFill/>
           </a:ln>
-          <a:effectLst/>
         </p:spPr>
         <p:style>
           <a:lnRef idx="1">
@@ -7903,7 +6674,6 @@
           <a:ln>
             <a:noFill/>
           </a:ln>
-          <a:effectLst/>
         </p:spPr>
         <p:style>
           <a:lnRef idx="1">
@@ -7947,7 +6717,6 @@
           <a:ln>
             <a:noFill/>
           </a:ln>
-          <a:effectLst/>
         </p:spPr>
         <p:style>
           <a:lnRef idx="1">
@@ -8099,7 +6868,6 @@
           <a:ln>
             <a:noFill/>
           </a:ln>
-          <a:effectLst/>
         </p:spPr>
         <p:style>
           <a:lnRef idx="1">
@@ -8143,7 +6911,6 @@
           <a:ln>
             <a:noFill/>
           </a:ln>
-          <a:effectLst/>
         </p:spPr>
         <p:style>
           <a:lnRef idx="1">
@@ -8235,7 +7002,6 @@
           <a:ln>
             <a:noFill/>
           </a:ln>
-          <a:effectLst/>
         </p:spPr>
         <p:style>
           <a:lnRef idx="1">
@@ -8327,7 +7093,6 @@
           <a:ln>
             <a:noFill/>
           </a:ln>
-          <a:effectLst/>
         </p:spPr>
         <p:style>
           <a:lnRef idx="1">
@@ -8419,7 +7184,6 @@
           <a:ln>
             <a:noFill/>
           </a:ln>
-          <a:effectLst/>
         </p:spPr>
         <p:style>
           <a:lnRef idx="1">
@@ -8511,7 +7275,6 @@
           <a:ln>
             <a:noFill/>
           </a:ln>
-          <a:effectLst/>
         </p:spPr>
         <p:style>
           <a:lnRef idx="1">
@@ -8621,7 +7384,6 @@
           <a:ln>
             <a:noFill/>
           </a:ln>
-          <a:effectLst/>
         </p:spPr>
         <p:style>
           <a:lnRef idx="1">
@@ -8665,7 +7427,6 @@
           <a:ln>
             <a:noFill/>
           </a:ln>
-          <a:effectLst/>
         </p:spPr>
         <p:style>
           <a:lnRef idx="1">
@@ -8817,7 +7578,6 @@
           <a:ln>
             <a:noFill/>
           </a:ln>
-          <a:effectLst/>
         </p:spPr>
         <p:style>
           <a:lnRef idx="1">
@@ -8903,7 +7663,6 @@
           <a:ln>
             <a:noFill/>
           </a:ln>
-          <a:effectLst/>
         </p:spPr>
         <p:style>
           <a:lnRef idx="1">
@@ -8995,7 +7754,6 @@
           <a:ln>
             <a:noFill/>
           </a:ln>
-          <a:effectLst/>
         </p:spPr>
         <p:style>
           <a:lnRef idx="1">
@@ -9087,7 +7845,6 @@
           <a:ln>
             <a:noFill/>
           </a:ln>
-          <a:effectLst/>
         </p:spPr>
         <p:style>
           <a:lnRef idx="1">
@@ -9179,7 +7936,6 @@
           <a:ln>
             <a:noFill/>
           </a:ln>
-          <a:effectLst/>
         </p:spPr>
         <p:style>
           <a:lnRef idx="1">
@@ -9313,7 +8069,6 @@
           <a:ln>
             <a:noFill/>
           </a:ln>
-          <a:effectLst/>
         </p:spPr>
         <p:style>
           <a:lnRef idx="1">
@@ -9405,7 +8160,6 @@
           <a:ln>
             <a:noFill/>
           </a:ln>
-          <a:effectLst/>
         </p:spPr>
         <p:style>
           <a:lnRef idx="1">
@@ -9497,7 +8251,6 @@
           <a:ln>
             <a:noFill/>
           </a:ln>
-          <a:effectLst/>
         </p:spPr>
         <p:style>
           <a:lnRef idx="1">
@@ -9589,7 +8342,6 @@
           <a:ln>
             <a:noFill/>
           </a:ln>
-          <a:effectLst/>
         </p:spPr>
         <p:style>
           <a:lnRef idx="1">
@@ -9681,7 +8433,6 @@
           <a:ln>
             <a:noFill/>
           </a:ln>
-          <a:effectLst/>
         </p:spPr>
         <p:style>
           <a:lnRef idx="1">
@@ -9773,7 +8524,6 @@
           <a:ln>
             <a:noFill/>
           </a:ln>
-          <a:effectLst/>
         </p:spPr>
         <p:style>
           <a:lnRef idx="1">
@@ -9925,7 +8675,6 @@
           <a:ln>
             <a:noFill/>
           </a:ln>
-          <a:effectLst/>
         </p:spPr>
         <p:style>
           <a:lnRef idx="1">
@@ -9969,7 +8718,6 @@
           <a:ln>
             <a:noFill/>
           </a:ln>
-          <a:effectLst/>
         </p:spPr>
         <p:style>
           <a:lnRef idx="1">
@@ -10121,7 +8869,6 @@
           <a:ln>
             <a:noFill/>
           </a:ln>
-          <a:effectLst/>
         </p:spPr>
         <p:style>
           <a:lnRef idx="1">
@@ -10165,7 +8912,6 @@
           <a:ln>
             <a:noFill/>
           </a:ln>
-          <a:effectLst/>
         </p:spPr>
         <p:style>
           <a:lnRef idx="1">
@@ -10257,7 +9003,6 @@
           <a:ln>
             <a:noFill/>
           </a:ln>
-          <a:effectLst/>
         </p:spPr>
         <p:style>
           <a:lnRef idx="1">
@@ -10349,7 +9094,6 @@
           <a:ln>
             <a:noFill/>
           </a:ln>
-          <a:effectLst/>
         </p:spPr>
         <p:style>
           <a:lnRef idx="1">
@@ -10483,7 +9227,6 @@
           <a:ln>
             <a:noFill/>
           </a:ln>
-          <a:effectLst/>
         </p:spPr>
         <p:style>
           <a:lnRef idx="1">
@@ -10575,7 +9318,6 @@
           <a:ln>
             <a:noFill/>
           </a:ln>
-          <a:effectLst/>
         </p:spPr>
         <p:style>
           <a:lnRef idx="1">
@@ -10667,7 +9409,6 @@
           <a:ln>
             <a:noFill/>
           </a:ln>
-          <a:effectLst/>
         </p:spPr>
         <p:style>
           <a:lnRef idx="1">
@@ -10777,7 +9518,6 @@
           <a:ln>
             <a:noFill/>
           </a:ln>
-          <a:effectLst/>
         </p:spPr>
         <p:style>
           <a:lnRef idx="1">
@@ -10821,7 +9561,6 @@
           <a:ln>
             <a:noFill/>
           </a:ln>
-          <a:effectLst/>
         </p:spPr>
         <p:style>
           <a:lnRef idx="1">
@@ -10973,7 +9712,6 @@
           <a:ln>
             <a:noFill/>
           </a:ln>
-          <a:effectLst/>
         </p:spPr>
         <p:style>
           <a:lnRef idx="1">
@@ -11017,7 +9755,6 @@
           <a:ln>
             <a:noFill/>
           </a:ln>
-          <a:effectLst/>
         </p:spPr>
         <p:style>
           <a:lnRef idx="1">
@@ -11109,7 +9846,6 @@
           <a:ln>
             <a:noFill/>
           </a:ln>
-          <a:effectLst/>
         </p:spPr>
         <p:style>
           <a:lnRef idx="1">
@@ -11201,7 +9937,6 @@
           <a:ln>
             <a:noFill/>
           </a:ln>
-          <a:effectLst/>
         </p:spPr>
         <p:style>
           <a:lnRef idx="1">
@@ -11293,7 +10028,6 @@
           <a:ln>
             <a:noFill/>
           </a:ln>
-          <a:effectLst/>
         </p:spPr>
         <p:style>
           <a:lnRef idx="1">
@@ -11385,7 +10119,6 @@
           <a:ln>
             <a:noFill/>
           </a:ln>
-          <a:effectLst/>
         </p:spPr>
         <p:style>
           <a:lnRef idx="1">
@@ -11477,7 +10210,6 @@
           <a:ln>
             <a:noFill/>
           </a:ln>
-          <a:effectLst/>
         </p:spPr>
         <p:style>
           <a:lnRef idx="1">
@@ -11875,324 +10607,4 @@
   </a:objectDefaults>
   <a:extraClrSchemeLst/>
 </a:theme>
-</file>
-
-<file path=ppt/theme/theme2.xml><?xml version="1.0" encoding="utf-8"?>
-<a:theme xmlns:a="http://schemas.openxmlformats.org/drawingml/2006/main" name="Office Theme">
-  <a:themeElements>
-    <a:clrScheme name="Office">
-      <a:dk1>
-        <a:sysClr val="windowText" lastClr="000000"/>
-      </a:dk1>
-      <a:lt1>
-        <a:sysClr val="window" lastClr="FFFFFF"/>
-      </a:lt1>
-      <a:dk2>
-        <a:srgbClr val="1F497D"/>
-      </a:dk2>
-      <a:lt2>
-        <a:srgbClr val="EEECE1"/>
-      </a:lt2>
-      <a:accent1>
-        <a:srgbClr val="4F81BD"/>
-      </a:accent1>
-      <a:accent2>
-        <a:srgbClr val="C0504D"/>
-      </a:accent2>
-      <a:accent3>
-        <a:srgbClr val="9BBB59"/>
-      </a:accent3>
-      <a:accent4>
-        <a:srgbClr val="8064A2"/>
-      </a:accent4>
-      <a:accent5>
-        <a:srgbClr val="4BACC6"/>
-      </a:accent5>
-      <a:accent6>
-        <a:srgbClr val="F79646"/>
-      </a:accent6>
-      <a:hlink>
-        <a:srgbClr val="0000FF"/>
-      </a:hlink>
-      <a:folHlink>
-        <a:srgbClr val="800080"/>
-      </a:folHlink>
-    </a:clrScheme>
-    <a:fontScheme name="Office">
-      <a:majorFont>
-        <a:latin typeface="Calibri"/>
-        <a:ea typeface=""/>
-        <a:cs typeface=""/>
-        <a:font script="Jpan" typeface="ＭＳ Ｐゴシック"/>
-        <a:font script="Hang" typeface="맑은 고딕"/>
-        <a:font script="Hans" typeface="宋体"/>
-        <a:font script="Hant" typeface="新細明體"/>
-        <a:font script="Arab" typeface="Times New Roman"/>
-        <a:font script="Hebr" typeface="Times New Roman"/>
-        <a:font script="Thai" typeface="Angsana New"/>
-        <a:font script="Ethi" typeface="Nyala"/>
-        <a:font script="Beng" typeface="Vrinda"/>
-        <a:font script="Gujr" typeface="Shruti"/>
-        <a:font script="Khmr" typeface="MoolBoran"/>
-        <a:font script="Knda" typeface="Tunga"/>
-        <a:font script="Guru" typeface="Raavi"/>
-        <a:font script="Cans" typeface="Euphemia"/>
-        <a:font script="Cher" typeface="Plantagenet Cherokee"/>
-        <a:font script="Yiii" typeface="Microsoft Yi Baiti"/>
-        <a:font script="Tibt" typeface="Microsoft Himalaya"/>
-        <a:font script="Thaa" typeface="MV Boli"/>
-        <a:font script="Deva" typeface="Mangal"/>
-        <a:font script="Telu" typeface="Gautami"/>
-        <a:font script="Taml" typeface="Latha"/>
-        <a:font script="Syrc" typeface="Estrangelo Edessa"/>
-        <a:font script="Orya" typeface="Kalinga"/>
-        <a:font script="Mlym" typeface="Kartika"/>
-        <a:font script="Laoo" typeface="DokChampa"/>
-        <a:font script="Sinh" typeface="Iskoola Pota"/>
-        <a:font script="Mong" typeface="Mongolian Baiti"/>
-        <a:font script="Viet" typeface="Times New Roman"/>
-        <a:font script="Uigh" typeface="Microsoft Uighur"/>
-        <a:font script="Geor" typeface="Sylfaen"/>
-      </a:majorFont>
-      <a:minorFont>
-        <a:latin typeface="Calibri"/>
-        <a:ea typeface=""/>
-        <a:cs typeface=""/>
-        <a:font script="Jpan" typeface="ＭＳ Ｐゴシック"/>
-        <a:font script="Hang" typeface="맑은 고딕"/>
-        <a:font script="Hans" typeface="宋体"/>
-        <a:font script="Hant" typeface="新細明體"/>
-        <a:font script="Arab" typeface="Arial"/>
-        <a:font script="Hebr" typeface="Arial"/>
-        <a:font script="Thai" typeface="Cordia New"/>
-        <a:font script="Ethi" typeface="Nyala"/>
-        <a:font script="Beng" typeface="Vrinda"/>
-        <a:font script="Gujr" typeface="Shruti"/>
-        <a:font script="Khmr" typeface="DaunPenh"/>
-        <a:font script="Knda" typeface="Tunga"/>
-        <a:font script="Guru" typeface="Raavi"/>
-        <a:font script="Cans" typeface="Euphemia"/>
-        <a:font script="Cher" typeface="Plantagenet Cherokee"/>
-        <a:font script="Yiii" typeface="Microsoft Yi Baiti"/>
-        <a:font script="Tibt" typeface="Microsoft Himalaya"/>
-        <a:font script="Thaa" typeface="MV Boli"/>
-        <a:font script="Deva" typeface="Mangal"/>
-        <a:font script="Telu" typeface="Gautami"/>
-        <a:font script="Taml" typeface="Latha"/>
-        <a:font script="Syrc" typeface="Estrangelo Edessa"/>
-        <a:font script="Orya" typeface="Kalinga"/>
-        <a:font script="Mlym" typeface="Kartika"/>
-        <a:font script="Laoo" typeface="DokChampa"/>
-        <a:font script="Sinh" typeface="Iskoola Pota"/>
-        <a:font script="Mong" typeface="Mongolian Baiti"/>
-        <a:font script="Viet" typeface="Arial"/>
-        <a:font script="Uigh" typeface="Microsoft Uighur"/>
-        <a:font script="Geor" typeface="Sylfaen"/>
-      </a:minorFont>
-    </a:fontScheme>
-    <a:fmtScheme name="Office">
-      <a:fillStyleLst>
-        <a:solidFill>
-          <a:schemeClr val="phClr"/>
-        </a:solidFill>
-        <a:gradFill rotWithShape="1">
-          <a:gsLst>
-            <a:gs pos="0">
-              <a:schemeClr val="phClr">
-                <a:tint val="50000"/>
-                <a:satMod val="300000"/>
-              </a:schemeClr>
-            </a:gs>
-            <a:gs pos="35000">
-              <a:schemeClr val="phClr">
-                <a:tint val="37000"/>
-                <a:satMod val="300000"/>
-              </a:schemeClr>
-            </a:gs>
-            <a:gs pos="100000">
-              <a:schemeClr val="phClr">
-                <a:tint val="15000"/>
-                <a:satMod val="350000"/>
-              </a:schemeClr>
-            </a:gs>
-          </a:gsLst>
-          <a:lin ang="16200000" scaled="1"/>
-        </a:gradFill>
-        <a:gradFill rotWithShape="1">
-          <a:gsLst>
-            <a:gs pos="0">
-              <a:schemeClr val="phClr">
-                <a:tint val="100000"/>
-                <a:shade val="100000"/>
-                <a:satMod val="130000"/>
-              </a:schemeClr>
-            </a:gs>
-            <a:gs pos="100000">
-              <a:schemeClr val="phClr">
-                <a:tint val="50000"/>
-                <a:shade val="100000"/>
-                <a:satMod val="350000"/>
-              </a:schemeClr>
-            </a:gs>
-          </a:gsLst>
-          <a:lin ang="16200000" scaled="0"/>
-        </a:gradFill>
-      </a:fillStyleLst>
-      <a:lnStyleLst>
-        <a:ln w="9525" cap="flat" cmpd="sng" algn="ctr">
-          <a:solidFill>
-            <a:schemeClr val="phClr">
-              <a:shade val="95000"/>
-              <a:satMod val="105000"/>
-            </a:schemeClr>
-          </a:solidFill>
-          <a:prstDash val="solid"/>
-        </a:ln>
-        <a:ln w="25400" cap="flat" cmpd="sng" algn="ctr">
-          <a:solidFill>
-            <a:schemeClr val="phClr"/>
-          </a:solidFill>
-          <a:prstDash val="solid"/>
-        </a:ln>
-        <a:ln w="38100" cap="flat" cmpd="sng" algn="ctr">
-          <a:solidFill>
-            <a:schemeClr val="phClr"/>
-          </a:solidFill>
-          <a:prstDash val="solid"/>
-        </a:ln>
-      </a:lnStyleLst>
-      <a:effectStyleLst>
-        <a:effectStyle>
-          <a:effectLst>
-            <a:outerShdw blurRad="40000" dist="20000" dir="5400000" rotWithShape="0">
-              <a:srgbClr val="000000">
-                <a:alpha val="38000"/>
-              </a:srgbClr>
-            </a:outerShdw>
-          </a:effectLst>
-        </a:effectStyle>
-        <a:effectStyle>
-          <a:effectLst>
-            <a:outerShdw blurRad="40000" dist="23000" dir="5400000" rotWithShape="0">
-              <a:srgbClr val="000000">
-                <a:alpha val="35000"/>
-              </a:srgbClr>
-            </a:outerShdw>
-          </a:effectLst>
-        </a:effectStyle>
-        <a:effectStyle>
-          <a:effectLst>
-            <a:outerShdw blurRad="40000" dist="23000" dir="5400000" rotWithShape="0">
-              <a:srgbClr val="000000">
-                <a:alpha val="35000"/>
-              </a:srgbClr>
-            </a:outerShdw>
-          </a:effectLst>
-          <a:scene3d>
-            <a:camera prst="orthographicFront">
-              <a:rot lat="0" lon="0" rev="0"/>
-            </a:camera>
-            <a:lightRig rig="threePt" dir="t">
-              <a:rot lat="0" lon="0" rev="1200000"/>
-            </a:lightRig>
-          </a:scene3d>
-          <a:sp3d>
-            <a:bevelT w="63500" h="25400"/>
-          </a:sp3d>
-        </a:effectStyle>
-      </a:effectStyleLst>
-      <a:bgFillStyleLst>
-        <a:solidFill>
-          <a:schemeClr val="phClr"/>
-        </a:solidFill>
-        <a:gradFill rotWithShape="1">
-          <a:gsLst>
-            <a:gs pos="0">
-              <a:schemeClr val="phClr">
-                <a:tint val="40000"/>
-                <a:satMod val="350000"/>
-              </a:schemeClr>
-            </a:gs>
-            <a:gs pos="40000">
-              <a:schemeClr val="phClr">
-                <a:tint val="45000"/>
-                <a:shade val="99000"/>
-                <a:satMod val="350000"/>
-              </a:schemeClr>
-            </a:gs>
-            <a:gs pos="100000">
-              <a:schemeClr val="phClr">
-                <a:shade val="20000"/>
-                <a:satMod val="255000"/>
-              </a:schemeClr>
-            </a:gs>
-          </a:gsLst>
-          <a:path path="circle">
-            <a:fillToRect l="50000" t="-80000" r="50000" b="180000"/>
-          </a:path>
-        </a:gradFill>
-        <a:gradFill rotWithShape="1">
-          <a:gsLst>
-            <a:gs pos="0">
-              <a:schemeClr val="phClr">
-                <a:tint val="80000"/>
-                <a:satMod val="300000"/>
-              </a:schemeClr>
-            </a:gs>
-            <a:gs pos="100000">
-              <a:schemeClr val="phClr">
-                <a:shade val="30000"/>
-                <a:satMod val="200000"/>
-              </a:schemeClr>
-            </a:gs>
-          </a:gsLst>
-          <a:path path="circle">
-            <a:fillToRect l="50000" t="50000" r="50000" b="50000"/>
-          </a:path>
-        </a:gradFill>
-      </a:bgFillStyleLst>
-    </a:fmtScheme>
-  </a:themeElements>
-  <a:objectDefaults>
-    <a:spDef>
-      <a:spPr/>
-      <a:bodyPr/>
-      <a:lstStyle/>
-      <a:style>
-        <a:lnRef idx="1">
-          <a:schemeClr val="accent1"/>
-        </a:lnRef>
-        <a:fillRef idx="3">
-          <a:schemeClr val="accent1"/>
-        </a:fillRef>
-        <a:effectRef idx="2">
-          <a:schemeClr val="accent1"/>
-        </a:effectRef>
-        <a:fontRef idx="minor">
-          <a:schemeClr val="lt1"/>
-        </a:fontRef>
-      </a:style>
-    </a:spDef>
-    <a:lnDef>
-      <a:spPr/>
-      <a:bodyPr/>
-      <a:lstStyle/>
-      <a:style>
-        <a:lnRef idx="2">
-          <a:schemeClr val="accent1"/>
-        </a:lnRef>
-        <a:fillRef idx="0">
-          <a:schemeClr val="accent1"/>
-        </a:fillRef>
-        <a:effectRef idx="1">
-          <a:schemeClr val="accent1"/>
-        </a:effectRef>
-        <a:fontRef idx="minor">
-          <a:schemeClr val="tx1"/>
-        </a:fontRef>
-      </a:style>
-    </a:lnDef>
-  </a:objectDefaults>
-  <a:extraClrSchemeLst/>
-</a:theme>
 </file>
--- a/docs/RAAHI-loom-deck.pptx
+++ b/docs/RAAHI-loom-deck.pptx
@@ -8408,7 +8408,7 @@
                 </a:solidFill>
                 <a:latin typeface="Helvetica Neue"/>
               </a:rPr>
-              <a:t>Arabic + Hindi, switches mid-call</a:t>
+              <a:t>AR · HI · ZH · FR, switches mid-call</a:t>
             </a:r>
           </a:p>
         </p:txBody>
